--- a/docs/pptx/auc3/ritu-auc3-linsubhr-ratio-hosp1_10pct.pptx
+++ b/docs/pptx/auc3/ritu-auc3-linsubhr-ratio-hosp1_10pct.pptx
@@ -2443,7 +2443,7 @@
           </p:nvSpPr>
           <p:spPr>
             <a:xfrm>
-              <a:off x="1012387" y="2073503"/>
+              <a:off x="1013326" y="2073503"/>
               <a:ext cx="0" cy="3649639"/>
             </a:xfrm>
             <a:custGeom>
@@ -2486,7 +2486,7 @@
           </p:nvSpPr>
           <p:spPr>
             <a:xfrm>
-              <a:off x="1914572" y="2073503"/>
+              <a:off x="1915271" y="2073503"/>
               <a:ext cx="0" cy="3649639"/>
             </a:xfrm>
             <a:custGeom>
@@ -2529,7 +2529,7 @@
           </p:nvSpPr>
           <p:spPr>
             <a:xfrm>
-              <a:off x="2816756" y="2073503"/>
+              <a:off x="2817216" y="2073503"/>
               <a:ext cx="0" cy="3649639"/>
             </a:xfrm>
             <a:custGeom>
@@ -2572,7 +2572,7 @@
           </p:nvSpPr>
           <p:spPr>
             <a:xfrm>
-              <a:off x="3718941" y="2073503"/>
+              <a:off x="3719160" y="2073503"/>
               <a:ext cx="0" cy="3649639"/>
             </a:xfrm>
             <a:custGeom>
@@ -2615,7 +2615,7 @@
           </p:nvSpPr>
           <p:spPr>
             <a:xfrm>
-              <a:off x="4621125" y="2073503"/>
+              <a:off x="4621105" y="2073503"/>
               <a:ext cx="0" cy="3649639"/>
             </a:xfrm>
             <a:custGeom>
@@ -2658,7 +2658,7 @@
           </p:nvSpPr>
           <p:spPr>
             <a:xfrm>
-              <a:off x="5523310" y="2073503"/>
+              <a:off x="5523050" y="2073503"/>
               <a:ext cx="0" cy="3649639"/>
             </a:xfrm>
             <a:custGeom>
@@ -2701,7 +2701,7 @@
           </p:nvSpPr>
           <p:spPr>
             <a:xfrm>
-              <a:off x="6425495" y="2073503"/>
+              <a:off x="6424995" y="2073503"/>
               <a:ext cx="0" cy="3649639"/>
             </a:xfrm>
             <a:custGeom>
@@ -2744,7 +2744,7 @@
           </p:nvSpPr>
           <p:spPr>
             <a:xfrm>
-              <a:off x="7327679" y="2073503"/>
+              <a:off x="7326940" y="2073503"/>
               <a:ext cx="0" cy="3649639"/>
             </a:xfrm>
             <a:custGeom>
@@ -2787,7 +2787,7 @@
           </p:nvSpPr>
           <p:spPr>
             <a:xfrm>
-              <a:off x="8229864" y="2073503"/>
+              <a:off x="8228885" y="2073503"/>
               <a:ext cx="0" cy="3649639"/>
             </a:xfrm>
             <a:custGeom>
@@ -3045,7 +3045,7 @@
           </p:nvSpPr>
           <p:spPr>
             <a:xfrm>
-              <a:off x="1463479" y="2073503"/>
+              <a:off x="1464298" y="2073503"/>
               <a:ext cx="0" cy="3649639"/>
             </a:xfrm>
             <a:custGeom>
@@ -3088,7 +3088,7 @@
           </p:nvSpPr>
           <p:spPr>
             <a:xfrm>
-              <a:off x="2365664" y="2073503"/>
+              <a:off x="2366243" y="2073503"/>
               <a:ext cx="0" cy="3649639"/>
             </a:xfrm>
             <a:custGeom>
@@ -3131,7 +3131,7 @@
           </p:nvSpPr>
           <p:spPr>
             <a:xfrm>
-              <a:off x="3267849" y="2073503"/>
+              <a:off x="3268188" y="2073503"/>
               <a:ext cx="0" cy="3649639"/>
             </a:xfrm>
             <a:custGeom>
@@ -3174,7 +3174,7 @@
           </p:nvSpPr>
           <p:spPr>
             <a:xfrm>
-              <a:off x="4170033" y="2073503"/>
+              <a:off x="4170133" y="2073503"/>
               <a:ext cx="0" cy="3649639"/>
             </a:xfrm>
             <a:custGeom>
@@ -3217,7 +3217,7 @@
           </p:nvSpPr>
           <p:spPr>
             <a:xfrm>
-              <a:off x="5072218" y="2073503"/>
+              <a:off x="5072078" y="2073503"/>
               <a:ext cx="0" cy="3649639"/>
             </a:xfrm>
             <a:custGeom>
@@ -3260,7 +3260,7 @@
           </p:nvSpPr>
           <p:spPr>
             <a:xfrm>
-              <a:off x="5974402" y="2073503"/>
+              <a:off x="5974022" y="2073503"/>
               <a:ext cx="0" cy="3649639"/>
             </a:xfrm>
             <a:custGeom>
@@ -3303,7 +3303,7 @@
           </p:nvSpPr>
           <p:spPr>
             <a:xfrm>
-              <a:off x="6876587" y="2073503"/>
+              <a:off x="6875967" y="2073503"/>
               <a:ext cx="0" cy="3649639"/>
             </a:xfrm>
             <a:custGeom>
@@ -3346,7 +3346,7 @@
           </p:nvSpPr>
           <p:spPr>
             <a:xfrm>
-              <a:off x="7778772" y="2073503"/>
+              <a:off x="7777912" y="2073503"/>
               <a:ext cx="0" cy="3649639"/>
             </a:xfrm>
             <a:custGeom>
@@ -3390,521 +3390,521 @@
           <p:spPr>
             <a:xfrm>
               <a:off x="1172049" y="2073503"/>
-              <a:ext cx="7090630" cy="3404067"/>
+              <a:ext cx="7090630" cy="3403876"/>
             </a:xfrm>
             <a:custGeom>
               <a:avLst/>
               <a:pathLst>
-                <a:path w="7090630" h="3404067">
+                <a:path w="7090630" h="3403876">
                   <a:moveTo>
-                    <a:pt x="483002" y="0"/>
+                    <a:pt x="488871" y="0"/>
                   </a:moveTo>
                   <a:lnTo>
-                    <a:pt x="501357" y="36922"/>
-                  </a:lnTo>
-                  <a:lnTo>
-                    <a:pt x="572980" y="175211"/>
-                  </a:lnTo>
-                  <a:lnTo>
-                    <a:pt x="644602" y="307952"/>
-                  </a:lnTo>
-                  <a:lnTo>
-                    <a:pt x="716225" y="435367"/>
-                  </a:lnTo>
-                  <a:lnTo>
-                    <a:pt x="787847" y="557671"/>
-                  </a:lnTo>
-                  <a:lnTo>
-                    <a:pt x="859470" y="675067"/>
-                  </a:lnTo>
-                  <a:lnTo>
-                    <a:pt x="931092" y="787753"/>
-                  </a:lnTo>
-                  <a:lnTo>
-                    <a:pt x="1002715" y="895919"/>
-                  </a:lnTo>
-                  <a:lnTo>
-                    <a:pt x="1074337" y="999745"/>
-                  </a:lnTo>
-                  <a:lnTo>
-                    <a:pt x="1145960" y="1099405"/>
-                  </a:lnTo>
-                  <a:lnTo>
-                    <a:pt x="1217582" y="1195066"/>
-                  </a:lnTo>
-                  <a:lnTo>
-                    <a:pt x="1289205" y="1286890"/>
-                  </a:lnTo>
-                  <a:lnTo>
-                    <a:pt x="1360827" y="1375030"/>
-                  </a:lnTo>
-                  <a:lnTo>
-                    <a:pt x="1432450" y="1459633"/>
-                  </a:lnTo>
-                  <a:lnTo>
-                    <a:pt x="1504073" y="1540842"/>
-                  </a:lnTo>
-                  <a:lnTo>
-                    <a:pt x="1575695" y="1618793"/>
-                  </a:lnTo>
-                  <a:lnTo>
-                    <a:pt x="1647318" y="1693616"/>
-                  </a:lnTo>
-                  <a:lnTo>
-                    <a:pt x="1718940" y="1765438"/>
-                  </a:lnTo>
-                  <a:lnTo>
-                    <a:pt x="1790563" y="1834377"/>
-                  </a:lnTo>
-                  <a:lnTo>
-                    <a:pt x="1862185" y="1900551"/>
-                  </a:lnTo>
-                  <a:lnTo>
-                    <a:pt x="1933808" y="1964070"/>
-                  </a:lnTo>
-                  <a:lnTo>
-                    <a:pt x="2005430" y="2025041"/>
-                  </a:lnTo>
-                  <a:lnTo>
-                    <a:pt x="2077053" y="2083565"/>
-                  </a:lnTo>
-                  <a:lnTo>
-                    <a:pt x="2148675" y="2139742"/>
-                  </a:lnTo>
-                  <a:lnTo>
-                    <a:pt x="2220298" y="2193664"/>
-                  </a:lnTo>
-                  <a:lnTo>
-                    <a:pt x="2291920" y="2245423"/>
-                  </a:lnTo>
-                  <a:lnTo>
-                    <a:pt x="2363543" y="2295106"/>
-                  </a:lnTo>
-                  <a:lnTo>
-                    <a:pt x="2435165" y="2342795"/>
-                  </a:lnTo>
-                  <a:lnTo>
-                    <a:pt x="2506788" y="2388571"/>
-                  </a:lnTo>
-                  <a:lnTo>
-                    <a:pt x="2578410" y="2432510"/>
-                  </a:lnTo>
-                  <a:lnTo>
-                    <a:pt x="2650033" y="2474687"/>
-                  </a:lnTo>
-                  <a:lnTo>
-                    <a:pt x="2721655" y="2515171"/>
-                  </a:lnTo>
-                  <a:lnTo>
-                    <a:pt x="2793278" y="2554031"/>
-                  </a:lnTo>
-                  <a:lnTo>
-                    <a:pt x="2864901" y="2591332"/>
-                  </a:lnTo>
-                  <a:lnTo>
-                    <a:pt x="2936523" y="2627136"/>
-                  </a:lnTo>
-                  <a:lnTo>
-                    <a:pt x="3008146" y="2646145"/>
-                  </a:lnTo>
-                  <a:lnTo>
-                    <a:pt x="3079768" y="2606962"/>
-                  </a:lnTo>
-                  <a:lnTo>
-                    <a:pt x="3151391" y="2565946"/>
-                  </a:lnTo>
-                  <a:lnTo>
-                    <a:pt x="3223013" y="2523011"/>
-                  </a:lnTo>
-                  <a:lnTo>
-                    <a:pt x="3294636" y="2478067"/>
-                  </a:lnTo>
-                  <a:lnTo>
-                    <a:pt x="3366258" y="2431021"/>
-                  </a:lnTo>
-                  <a:lnTo>
-                    <a:pt x="3437881" y="2381774"/>
-                  </a:lnTo>
-                  <a:lnTo>
-                    <a:pt x="3509503" y="2330223"/>
-                  </a:lnTo>
-                  <a:lnTo>
-                    <a:pt x="3581126" y="2276261"/>
-                  </a:lnTo>
-                  <a:lnTo>
-                    <a:pt x="3652748" y="2219775"/>
-                  </a:lnTo>
-                  <a:lnTo>
-                    <a:pt x="3724371" y="2160646"/>
-                  </a:lnTo>
-                  <a:lnTo>
-                    <a:pt x="3795993" y="2098750"/>
-                  </a:lnTo>
-                  <a:lnTo>
-                    <a:pt x="3867616" y="2033960"/>
-                  </a:lnTo>
-                  <a:lnTo>
-                    <a:pt x="3939238" y="1966138"/>
-                  </a:lnTo>
-                  <a:lnTo>
-                    <a:pt x="4010861" y="1895144"/>
-                  </a:lnTo>
-                  <a:lnTo>
-                    <a:pt x="4082483" y="1820829"/>
-                  </a:lnTo>
-                  <a:lnTo>
-                    <a:pt x="4154106" y="1743037"/>
-                  </a:lnTo>
-                  <a:lnTo>
-                    <a:pt x="4225729" y="1661606"/>
-                  </a:lnTo>
-                  <a:lnTo>
-                    <a:pt x="4297351" y="1576365"/>
-                  </a:lnTo>
-                  <a:lnTo>
-                    <a:pt x="4368974" y="1487137"/>
-                  </a:lnTo>
-                  <a:lnTo>
-                    <a:pt x="4440596" y="1393735"/>
-                  </a:lnTo>
-                  <a:lnTo>
-                    <a:pt x="4512219" y="1295964"/>
-                  </a:lnTo>
-                  <a:lnTo>
-                    <a:pt x="4583841" y="1193618"/>
-                  </a:lnTo>
-                  <a:lnTo>
-                    <a:pt x="4655464" y="1086485"/>
-                  </a:lnTo>
-                  <a:lnTo>
-                    <a:pt x="4727086" y="974341"/>
-                  </a:lnTo>
-                  <a:lnTo>
-                    <a:pt x="4798709" y="856950"/>
-                  </a:lnTo>
-                  <a:lnTo>
-                    <a:pt x="4870331" y="734067"/>
-                  </a:lnTo>
-                  <a:lnTo>
-                    <a:pt x="4941954" y="605436"/>
-                  </a:lnTo>
-                  <a:lnTo>
-                    <a:pt x="5013576" y="470788"/>
-                  </a:lnTo>
-                  <a:lnTo>
-                    <a:pt x="5085199" y="329841"/>
-                  </a:lnTo>
-                  <a:lnTo>
-                    <a:pt x="5156821" y="182300"/>
-                  </a:lnTo>
-                  <a:lnTo>
-                    <a:pt x="5228444" y="27857"/>
-                  </a:lnTo>
-                  <a:lnTo>
-                    <a:pt x="5240785" y="0"/>
+                    <a:pt x="501357" y="25208"/>
+                  </a:lnTo>
+                  <a:lnTo>
+                    <a:pt x="572980" y="164003"/>
+                  </a:lnTo>
+                  <a:lnTo>
+                    <a:pt x="644602" y="297229"/>
+                  </a:lnTo>
+                  <a:lnTo>
+                    <a:pt x="716225" y="425107"/>
+                  </a:lnTo>
+                  <a:lnTo>
+                    <a:pt x="787847" y="547854"/>
+                  </a:lnTo>
+                  <a:lnTo>
+                    <a:pt x="859470" y="665675"/>
+                  </a:lnTo>
+                  <a:lnTo>
+                    <a:pt x="931092" y="778768"/>
+                  </a:lnTo>
+                  <a:lnTo>
+                    <a:pt x="1002715" y="887322"/>
+                  </a:lnTo>
+                  <a:lnTo>
+                    <a:pt x="1074337" y="991520"/>
+                  </a:lnTo>
+                  <a:lnTo>
+                    <a:pt x="1145960" y="1091536"/>
+                  </a:lnTo>
+                  <a:lnTo>
+                    <a:pt x="1217582" y="1187538"/>
+                  </a:lnTo>
+                  <a:lnTo>
+                    <a:pt x="1289205" y="1279688"/>
+                  </a:lnTo>
+                  <a:lnTo>
+                    <a:pt x="1360827" y="1368140"/>
+                  </a:lnTo>
+                  <a:lnTo>
+                    <a:pt x="1432450" y="1453041"/>
+                  </a:lnTo>
+                  <a:lnTo>
+                    <a:pt x="1504073" y="1534536"/>
+                  </a:lnTo>
+                  <a:lnTo>
+                    <a:pt x="1575695" y="1612760"/>
+                  </a:lnTo>
+                  <a:lnTo>
+                    <a:pt x="1647318" y="1687845"/>
+                  </a:lnTo>
+                  <a:lnTo>
+                    <a:pt x="1718940" y="1759917"/>
+                  </a:lnTo>
+                  <a:lnTo>
+                    <a:pt x="1790563" y="1829097"/>
+                  </a:lnTo>
+                  <a:lnTo>
+                    <a:pt x="1862185" y="1895500"/>
+                  </a:lnTo>
+                  <a:lnTo>
+                    <a:pt x="1933808" y="1959238"/>
+                  </a:lnTo>
+                  <a:lnTo>
+                    <a:pt x="2005430" y="2020418"/>
+                  </a:lnTo>
+                  <a:lnTo>
+                    <a:pt x="2077053" y="2079144"/>
+                  </a:lnTo>
+                  <a:lnTo>
+                    <a:pt x="2148675" y="2135512"/>
+                  </a:lnTo>
+                  <a:lnTo>
+                    <a:pt x="2220298" y="2189618"/>
+                  </a:lnTo>
+                  <a:lnTo>
+                    <a:pt x="2291920" y="2241553"/>
+                  </a:lnTo>
+                  <a:lnTo>
+                    <a:pt x="2363543" y="2291404"/>
+                  </a:lnTo>
+                  <a:lnTo>
+                    <a:pt x="2435165" y="2339254"/>
+                  </a:lnTo>
+                  <a:lnTo>
+                    <a:pt x="2506788" y="2385184"/>
+                  </a:lnTo>
+                  <a:lnTo>
+                    <a:pt x="2578410" y="2429271"/>
+                  </a:lnTo>
+                  <a:lnTo>
+                    <a:pt x="2650033" y="2471588"/>
+                  </a:lnTo>
+                  <a:lnTo>
+                    <a:pt x="2721655" y="2512207"/>
+                  </a:lnTo>
+                  <a:lnTo>
+                    <a:pt x="2793278" y="2551196"/>
+                  </a:lnTo>
+                  <a:lnTo>
+                    <a:pt x="2864901" y="2588621"/>
+                  </a:lnTo>
+                  <a:lnTo>
+                    <a:pt x="2936523" y="2624543"/>
+                  </a:lnTo>
+                  <a:lnTo>
+                    <a:pt x="3008146" y="2648957"/>
+                  </a:lnTo>
+                  <a:lnTo>
+                    <a:pt x="3079768" y="2609894"/>
+                  </a:lnTo>
+                  <a:lnTo>
+                    <a:pt x="3151391" y="2569004"/>
+                  </a:lnTo>
+                  <a:lnTo>
+                    <a:pt x="3223013" y="2526200"/>
+                  </a:lnTo>
+                  <a:lnTo>
+                    <a:pt x="3294636" y="2481394"/>
+                  </a:lnTo>
+                  <a:lnTo>
+                    <a:pt x="3366258" y="2434490"/>
+                  </a:lnTo>
+                  <a:lnTo>
+                    <a:pt x="3437881" y="2385392"/>
+                  </a:lnTo>
+                  <a:lnTo>
+                    <a:pt x="3509503" y="2333997"/>
+                  </a:lnTo>
+                  <a:lnTo>
+                    <a:pt x="3581126" y="2280197"/>
+                  </a:lnTo>
+                  <a:lnTo>
+                    <a:pt x="3652748" y="2223879"/>
+                  </a:lnTo>
+                  <a:lnTo>
+                    <a:pt x="3724371" y="2164925"/>
+                  </a:lnTo>
+                  <a:lnTo>
+                    <a:pt x="3795993" y="2103213"/>
+                  </a:lnTo>
+                  <a:lnTo>
+                    <a:pt x="3867616" y="2038614"/>
+                  </a:lnTo>
+                  <a:lnTo>
+                    <a:pt x="3939238" y="1970992"/>
+                  </a:lnTo>
+                  <a:lnTo>
+                    <a:pt x="4010861" y="1900205"/>
+                  </a:lnTo>
+                  <a:lnTo>
+                    <a:pt x="4082483" y="1826106"/>
+                  </a:lnTo>
+                  <a:lnTo>
+                    <a:pt x="4154106" y="1748540"/>
+                  </a:lnTo>
+                  <a:lnTo>
+                    <a:pt x="4225729" y="1667344"/>
+                  </a:lnTo>
+                  <a:lnTo>
+                    <a:pt x="4297351" y="1582349"/>
+                  </a:lnTo>
+                  <a:lnTo>
+                    <a:pt x="4368974" y="1493376"/>
+                  </a:lnTo>
+                  <a:lnTo>
+                    <a:pt x="4440596" y="1400240"/>
+                  </a:lnTo>
+                  <a:lnTo>
+                    <a:pt x="4512219" y="1302746"/>
+                  </a:lnTo>
+                  <a:lnTo>
+                    <a:pt x="4583841" y="1200690"/>
+                  </a:lnTo>
+                  <a:lnTo>
+                    <a:pt x="4655464" y="1093859"/>
+                  </a:lnTo>
+                  <a:lnTo>
+                    <a:pt x="4727086" y="982028"/>
+                  </a:lnTo>
+                  <a:lnTo>
+                    <a:pt x="4798709" y="864965"/>
+                  </a:lnTo>
+                  <a:lnTo>
+                    <a:pt x="4870331" y="742424"/>
+                  </a:lnTo>
+                  <a:lnTo>
+                    <a:pt x="4941954" y="614149"/>
+                  </a:lnTo>
+                  <a:lnTo>
+                    <a:pt x="5013576" y="479871"/>
+                  </a:lnTo>
+                  <a:lnTo>
+                    <a:pt x="5085199" y="339310"/>
+                  </a:lnTo>
+                  <a:lnTo>
+                    <a:pt x="5156821" y="192172"/>
+                  </a:lnTo>
+                  <a:lnTo>
+                    <a:pt x="5228444" y="38149"/>
+                  </a:lnTo>
+                  <a:lnTo>
+                    <a:pt x="5245391" y="0"/>
                   </a:lnTo>
                   <a:lnTo>
                     <a:pt x="7090630" y="0"/>
                   </a:lnTo>
                   <a:lnTo>
-                    <a:pt x="7090630" y="3404067"/>
-                  </a:lnTo>
-                  <a:lnTo>
-                    <a:pt x="7019007" y="3400737"/>
-                  </a:lnTo>
-                  <a:lnTo>
-                    <a:pt x="6947385" y="3397267"/>
-                  </a:lnTo>
-                  <a:lnTo>
-                    <a:pt x="6875762" y="3393652"/>
-                  </a:lnTo>
-                  <a:lnTo>
-                    <a:pt x="6804139" y="3389887"/>
-                  </a:lnTo>
-                  <a:lnTo>
-                    <a:pt x="6732517" y="3385964"/>
-                  </a:lnTo>
-                  <a:lnTo>
-                    <a:pt x="6660894" y="3381877"/>
-                  </a:lnTo>
-                  <a:lnTo>
-                    <a:pt x="6589272" y="3377619"/>
-                  </a:lnTo>
-                  <a:lnTo>
-                    <a:pt x="6517649" y="3373183"/>
-                  </a:lnTo>
-                  <a:lnTo>
-                    <a:pt x="6446027" y="3368561"/>
-                  </a:lnTo>
-                  <a:lnTo>
-                    <a:pt x="6374404" y="3363747"/>
-                  </a:lnTo>
-                  <a:lnTo>
-                    <a:pt x="6302782" y="3358731"/>
-                  </a:lnTo>
-                  <a:lnTo>
-                    <a:pt x="6231159" y="3353506"/>
-                  </a:lnTo>
-                  <a:lnTo>
-                    <a:pt x="6159537" y="3348062"/>
-                  </a:lnTo>
-                  <a:lnTo>
-                    <a:pt x="6087914" y="3342391"/>
-                  </a:lnTo>
-                  <a:lnTo>
-                    <a:pt x="6016292" y="3336482"/>
-                  </a:lnTo>
-                  <a:lnTo>
-                    <a:pt x="5944669" y="3330327"/>
-                  </a:lnTo>
-                  <a:lnTo>
-                    <a:pt x="5873047" y="3323915"/>
-                  </a:lnTo>
-                  <a:lnTo>
-                    <a:pt x="5801424" y="3317234"/>
-                  </a:lnTo>
-                  <a:lnTo>
-                    <a:pt x="5729802" y="3310274"/>
-                  </a:lnTo>
-                  <a:lnTo>
-                    <a:pt x="5658179" y="3303023"/>
-                  </a:lnTo>
-                  <a:lnTo>
-                    <a:pt x="5586557" y="3295470"/>
-                  </a:lnTo>
-                  <a:lnTo>
-                    <a:pt x="5514934" y="3287600"/>
-                  </a:lnTo>
-                  <a:lnTo>
-                    <a:pt x="5443311" y="3279401"/>
-                  </a:lnTo>
-                  <a:lnTo>
-                    <a:pt x="5371689" y="3270860"/>
-                  </a:lnTo>
-                  <a:lnTo>
-                    <a:pt x="5300066" y="3261962"/>
-                  </a:lnTo>
-                  <a:lnTo>
-                    <a:pt x="5228444" y="3252692"/>
-                  </a:lnTo>
-                  <a:lnTo>
-                    <a:pt x="5156821" y="3243035"/>
-                  </a:lnTo>
-                  <a:lnTo>
-                    <a:pt x="5085199" y="3232973"/>
-                  </a:lnTo>
-                  <a:lnTo>
-                    <a:pt x="5013576" y="3222492"/>
-                  </a:lnTo>
-                  <a:lnTo>
-                    <a:pt x="4941954" y="3211572"/>
-                  </a:lnTo>
-                  <a:lnTo>
-                    <a:pt x="4870331" y="3200195"/>
-                  </a:lnTo>
-                  <a:lnTo>
-                    <a:pt x="4798709" y="3188344"/>
-                  </a:lnTo>
-                  <a:lnTo>
-                    <a:pt x="4727086" y="3175996"/>
-                  </a:lnTo>
-                  <a:lnTo>
-                    <a:pt x="4655464" y="3163133"/>
-                  </a:lnTo>
-                  <a:lnTo>
-                    <a:pt x="4583841" y="3149732"/>
-                  </a:lnTo>
-                  <a:lnTo>
-                    <a:pt x="4512219" y="3135771"/>
-                  </a:lnTo>
-                  <a:lnTo>
-                    <a:pt x="4440596" y="3121227"/>
-                  </a:lnTo>
-                  <a:lnTo>
-                    <a:pt x="4368974" y="3106074"/>
-                  </a:lnTo>
-                  <a:lnTo>
-                    <a:pt x="4297351" y="3090288"/>
-                  </a:lnTo>
-                  <a:lnTo>
-                    <a:pt x="4225729" y="3073843"/>
-                  </a:lnTo>
-                  <a:lnTo>
-                    <a:pt x="4154106" y="3056710"/>
-                  </a:lnTo>
-                  <a:lnTo>
-                    <a:pt x="4082483" y="3038860"/>
-                  </a:lnTo>
-                  <a:lnTo>
-                    <a:pt x="4010861" y="3020265"/>
-                  </a:lnTo>
-                  <a:lnTo>
-                    <a:pt x="3939238" y="3000893"/>
-                  </a:lnTo>
-                  <a:lnTo>
-                    <a:pt x="3867616" y="2980711"/>
-                  </a:lnTo>
-                  <a:lnTo>
-                    <a:pt x="3795993" y="2959685"/>
-                  </a:lnTo>
-                  <a:lnTo>
-                    <a:pt x="3724371" y="2937780"/>
-                  </a:lnTo>
-                  <a:lnTo>
-                    <a:pt x="3652748" y="2914960"/>
-                  </a:lnTo>
-                  <a:lnTo>
-                    <a:pt x="3581126" y="2891186"/>
-                  </a:lnTo>
-                  <a:lnTo>
-                    <a:pt x="3509503" y="2866418"/>
-                  </a:lnTo>
-                  <a:lnTo>
-                    <a:pt x="3437881" y="2840616"/>
-                  </a:lnTo>
-                  <a:lnTo>
-                    <a:pt x="3366258" y="2813734"/>
-                  </a:lnTo>
-                  <a:lnTo>
-                    <a:pt x="3294636" y="2785729"/>
-                  </a:lnTo>
-                  <a:lnTo>
-                    <a:pt x="3223013" y="2756554"/>
-                  </a:lnTo>
-                  <a:lnTo>
-                    <a:pt x="3151391" y="2726159"/>
-                  </a:lnTo>
-                  <a:lnTo>
-                    <a:pt x="3079768" y="2694493"/>
-                  </a:lnTo>
-                  <a:lnTo>
-                    <a:pt x="3008146" y="2661504"/>
-                  </a:lnTo>
-                  <a:lnTo>
-                    <a:pt x="2936523" y="2683577"/>
-                  </a:lnTo>
-                  <a:lnTo>
-                    <a:pt x="2864901" y="2719337"/>
-                  </a:lnTo>
-                  <a:lnTo>
-                    <a:pt x="2793278" y="2753498"/>
-                  </a:lnTo>
-                  <a:lnTo>
-                    <a:pt x="2721655" y="2786133"/>
-                  </a:lnTo>
-                  <a:lnTo>
-                    <a:pt x="2650033" y="2817309"/>
-                  </a:lnTo>
-                  <a:lnTo>
-                    <a:pt x="2578410" y="2847092"/>
-                  </a:lnTo>
-                  <a:lnTo>
-                    <a:pt x="2506788" y="2875544"/>
-                  </a:lnTo>
-                  <a:lnTo>
-                    <a:pt x="2435165" y="2902724"/>
-                  </a:lnTo>
-                  <a:lnTo>
-                    <a:pt x="2363543" y="2928690"/>
-                  </a:lnTo>
-                  <a:lnTo>
-                    <a:pt x="2291920" y="2953495"/>
-                  </a:lnTo>
-                  <a:lnTo>
-                    <a:pt x="2220298" y="2977192"/>
-                  </a:lnTo>
-                  <a:lnTo>
-                    <a:pt x="2148675" y="2999830"/>
-                  </a:lnTo>
-                  <a:lnTo>
-                    <a:pt x="2077053" y="3021456"/>
-                  </a:lnTo>
-                  <a:lnTo>
-                    <a:pt x="2005430" y="3042116"/>
-                  </a:lnTo>
-                  <a:lnTo>
-                    <a:pt x="1933808" y="3061852"/>
-                  </a:lnTo>
-                  <a:lnTo>
-                    <a:pt x="1862185" y="3080706"/>
-                  </a:lnTo>
-                  <a:lnTo>
-                    <a:pt x="1790563" y="3098718"/>
-                  </a:lnTo>
-                  <a:lnTo>
-                    <a:pt x="1718940" y="3115925"/>
-                  </a:lnTo>
-                  <a:lnTo>
-                    <a:pt x="1647318" y="3132363"/>
-                  </a:lnTo>
-                  <a:lnTo>
-                    <a:pt x="1575695" y="3148066"/>
-                  </a:lnTo>
-                  <a:lnTo>
-                    <a:pt x="1504073" y="3163068"/>
-                  </a:lnTo>
-                  <a:lnTo>
-                    <a:pt x="1432450" y="3177399"/>
-                  </a:lnTo>
-                  <a:lnTo>
-                    <a:pt x="1360827" y="3191089"/>
-                  </a:lnTo>
-                  <a:lnTo>
-                    <a:pt x="1289205" y="3204168"/>
-                  </a:lnTo>
-                  <a:lnTo>
-                    <a:pt x="1217582" y="3216662"/>
-                  </a:lnTo>
-                  <a:lnTo>
-                    <a:pt x="1145960" y="3228598"/>
-                  </a:lnTo>
-                  <a:lnTo>
-                    <a:pt x="1074337" y="3240001"/>
-                  </a:lnTo>
-                  <a:lnTo>
-                    <a:pt x="1002715" y="3250894"/>
-                  </a:lnTo>
-                  <a:lnTo>
-                    <a:pt x="931092" y="3261300"/>
-                  </a:lnTo>
-                  <a:lnTo>
-                    <a:pt x="859470" y="3271241"/>
-                  </a:lnTo>
-                  <a:lnTo>
-                    <a:pt x="787847" y="3280738"/>
-                  </a:lnTo>
-                  <a:lnTo>
-                    <a:pt x="716225" y="3289810"/>
-                  </a:lnTo>
-                  <a:lnTo>
-                    <a:pt x="644602" y="3298477"/>
-                  </a:lnTo>
-                  <a:lnTo>
-                    <a:pt x="572980" y="3306757"/>
-                  </a:lnTo>
-                  <a:lnTo>
-                    <a:pt x="501357" y="3314666"/>
-                  </a:lnTo>
-                  <a:lnTo>
-                    <a:pt x="429735" y="3322222"/>
-                  </a:lnTo>
-                  <a:lnTo>
-                    <a:pt x="358112" y="3329441"/>
-                  </a:lnTo>
-                  <a:lnTo>
-                    <a:pt x="286490" y="3336337"/>
-                  </a:lnTo>
-                  <a:lnTo>
-                    <a:pt x="214867" y="3342925"/>
-                  </a:lnTo>
-                  <a:lnTo>
-                    <a:pt x="143245" y="3349218"/>
-                  </a:lnTo>
-                  <a:lnTo>
-                    <a:pt x="71622" y="3355230"/>
-                  </a:lnTo>
-                  <a:lnTo>
-                    <a:pt x="0" y="3360973"/>
+                    <a:pt x="7090630" y="3403876"/>
+                  </a:lnTo>
+                  <a:lnTo>
+                    <a:pt x="7019007" y="3400537"/>
+                  </a:lnTo>
+                  <a:lnTo>
+                    <a:pt x="6947385" y="3397058"/>
+                  </a:lnTo>
+                  <a:lnTo>
+                    <a:pt x="6875762" y="3393434"/>
+                  </a:lnTo>
+                  <a:lnTo>
+                    <a:pt x="6804139" y="3389658"/>
+                  </a:lnTo>
+                  <a:lnTo>
+                    <a:pt x="6732517" y="3385724"/>
+                  </a:lnTo>
+                  <a:lnTo>
+                    <a:pt x="6660894" y="3381626"/>
+                  </a:lnTo>
+                  <a:lnTo>
+                    <a:pt x="6589272" y="3377356"/>
+                  </a:lnTo>
+                  <a:lnTo>
+                    <a:pt x="6517649" y="3372908"/>
+                  </a:lnTo>
+                  <a:lnTo>
+                    <a:pt x="6446027" y="3368274"/>
+                  </a:lnTo>
+                  <a:lnTo>
+                    <a:pt x="6374404" y="3363447"/>
+                  </a:lnTo>
+                  <a:lnTo>
+                    <a:pt x="6302782" y="3358417"/>
+                  </a:lnTo>
+                  <a:lnTo>
+                    <a:pt x="6231159" y="3353177"/>
+                  </a:lnTo>
+                  <a:lnTo>
+                    <a:pt x="6159537" y="3347718"/>
+                  </a:lnTo>
+                  <a:lnTo>
+                    <a:pt x="6087914" y="3342031"/>
+                  </a:lnTo>
+                  <a:lnTo>
+                    <a:pt x="6016292" y="3336106"/>
+                  </a:lnTo>
+                  <a:lnTo>
+                    <a:pt x="5944669" y="3329933"/>
+                  </a:lnTo>
+                  <a:lnTo>
+                    <a:pt x="5873047" y="3323502"/>
+                  </a:lnTo>
+                  <a:lnTo>
+                    <a:pt x="5801424" y="3316803"/>
+                  </a:lnTo>
+                  <a:lnTo>
+                    <a:pt x="5729802" y="3309823"/>
+                  </a:lnTo>
+                  <a:lnTo>
+                    <a:pt x="5658179" y="3302551"/>
+                  </a:lnTo>
+                  <a:lnTo>
+                    <a:pt x="5586557" y="3294976"/>
+                  </a:lnTo>
+                  <a:lnTo>
+                    <a:pt x="5514934" y="3287083"/>
+                  </a:lnTo>
+                  <a:lnTo>
+                    <a:pt x="5443311" y="3278861"/>
+                  </a:lnTo>
+                  <a:lnTo>
+                    <a:pt x="5371689" y="3270295"/>
+                  </a:lnTo>
+                  <a:lnTo>
+                    <a:pt x="5300066" y="3261371"/>
+                  </a:lnTo>
+                  <a:lnTo>
+                    <a:pt x="5228444" y="3252073"/>
+                  </a:lnTo>
+                  <a:lnTo>
+                    <a:pt x="5156821" y="3242387"/>
+                  </a:lnTo>
+                  <a:lnTo>
+                    <a:pt x="5085199" y="3232296"/>
+                  </a:lnTo>
+                  <a:lnTo>
+                    <a:pt x="5013576" y="3221783"/>
+                  </a:lnTo>
+                  <a:lnTo>
+                    <a:pt x="4941954" y="3210831"/>
+                  </a:lnTo>
+                  <a:lnTo>
+                    <a:pt x="4870331" y="3199421"/>
+                  </a:lnTo>
+                  <a:lnTo>
+                    <a:pt x="4798709" y="3187533"/>
+                  </a:lnTo>
+                  <a:lnTo>
+                    <a:pt x="4727086" y="3175149"/>
+                  </a:lnTo>
+                  <a:lnTo>
+                    <a:pt x="4655464" y="3162247"/>
+                  </a:lnTo>
+                  <a:lnTo>
+                    <a:pt x="4583841" y="3148805"/>
+                  </a:lnTo>
+                  <a:lnTo>
+                    <a:pt x="4512219" y="3134802"/>
+                  </a:lnTo>
+                  <a:lnTo>
+                    <a:pt x="4440596" y="3120212"/>
+                  </a:lnTo>
+                  <a:lnTo>
+                    <a:pt x="4368974" y="3105013"/>
+                  </a:lnTo>
+                  <a:lnTo>
+                    <a:pt x="4297351" y="3089179"/>
+                  </a:lnTo>
+                  <a:lnTo>
+                    <a:pt x="4225729" y="3072682"/>
+                  </a:lnTo>
+                  <a:lnTo>
+                    <a:pt x="4154106" y="3055496"/>
+                  </a:lnTo>
+                  <a:lnTo>
+                    <a:pt x="4082483" y="3037592"/>
+                  </a:lnTo>
+                  <a:lnTo>
+                    <a:pt x="4010861" y="3018938"/>
+                  </a:lnTo>
+                  <a:lnTo>
+                    <a:pt x="3939238" y="2999505"/>
+                  </a:lnTo>
+                  <a:lnTo>
+                    <a:pt x="3867616" y="2979259"/>
+                  </a:lnTo>
+                  <a:lnTo>
+                    <a:pt x="3795993" y="2958167"/>
+                  </a:lnTo>
+                  <a:lnTo>
+                    <a:pt x="3724371" y="2936193"/>
+                  </a:lnTo>
+                  <a:lnTo>
+                    <a:pt x="3652748" y="2913300"/>
+                  </a:lnTo>
+                  <a:lnTo>
+                    <a:pt x="3581126" y="2889451"/>
+                  </a:lnTo>
+                  <a:lnTo>
+                    <a:pt x="3509503" y="2864604"/>
+                  </a:lnTo>
+                  <a:lnTo>
+                    <a:pt x="3437881" y="2838718"/>
+                  </a:lnTo>
+                  <a:lnTo>
+                    <a:pt x="3366258" y="2811750"/>
+                  </a:lnTo>
+                  <a:lnTo>
+                    <a:pt x="3294636" y="2783654"/>
+                  </a:lnTo>
+                  <a:lnTo>
+                    <a:pt x="3223013" y="2754384"/>
+                  </a:lnTo>
+                  <a:lnTo>
+                    <a:pt x="3151391" y="2723890"/>
+                  </a:lnTo>
+                  <a:lnTo>
+                    <a:pt x="3079768" y="2692121"/>
+                  </a:lnTo>
+                  <a:lnTo>
+                    <a:pt x="3008146" y="2659024"/>
+                  </a:lnTo>
+                  <a:lnTo>
+                    <a:pt x="2936523" y="2686273"/>
+                  </a:lnTo>
+                  <a:lnTo>
+                    <a:pt x="2864901" y="2721921"/>
+                  </a:lnTo>
+                  <a:lnTo>
+                    <a:pt x="2793278" y="2755976"/>
+                  </a:lnTo>
+                  <a:lnTo>
+                    <a:pt x="2721655" y="2788509"/>
+                  </a:lnTo>
+                  <a:lnTo>
+                    <a:pt x="2650033" y="2819587"/>
+                  </a:lnTo>
+                  <a:lnTo>
+                    <a:pt x="2578410" y="2849276"/>
+                  </a:lnTo>
+                  <a:lnTo>
+                    <a:pt x="2506788" y="2877637"/>
+                  </a:lnTo>
+                  <a:lnTo>
+                    <a:pt x="2435165" y="2904731"/>
+                  </a:lnTo>
+                  <a:lnTo>
+                    <a:pt x="2363543" y="2930614"/>
+                  </a:lnTo>
+                  <a:lnTo>
+                    <a:pt x="2291920" y="2955340"/>
+                  </a:lnTo>
+                  <a:lnTo>
+                    <a:pt x="2220298" y="2978961"/>
+                  </a:lnTo>
+                  <a:lnTo>
+                    <a:pt x="2148675" y="3001525"/>
+                  </a:lnTo>
+                  <a:lnTo>
+                    <a:pt x="2077053" y="3023081"/>
+                  </a:lnTo>
+                  <a:lnTo>
+                    <a:pt x="2005430" y="3043674"/>
+                  </a:lnTo>
+                  <a:lnTo>
+                    <a:pt x="1933808" y="3063346"/>
+                  </a:lnTo>
+                  <a:lnTo>
+                    <a:pt x="1862185" y="3082138"/>
+                  </a:lnTo>
+                  <a:lnTo>
+                    <a:pt x="1790563" y="3100091"/>
+                  </a:lnTo>
+                  <a:lnTo>
+                    <a:pt x="1718940" y="3117241"/>
+                  </a:lnTo>
+                  <a:lnTo>
+                    <a:pt x="1647318" y="3133624"/>
+                  </a:lnTo>
+                  <a:lnTo>
+                    <a:pt x="1575695" y="3149275"/>
+                  </a:lnTo>
+                  <a:lnTo>
+                    <a:pt x="1504073" y="3164226"/>
+                  </a:lnTo>
+                  <a:lnTo>
+                    <a:pt x="1432450" y="3178509"/>
+                  </a:lnTo>
+                  <a:lnTo>
+                    <a:pt x="1360827" y="3192154"/>
+                  </a:lnTo>
+                  <a:lnTo>
+                    <a:pt x="1289205" y="3205188"/>
+                  </a:lnTo>
+                  <a:lnTo>
+                    <a:pt x="1217582" y="3217640"/>
+                  </a:lnTo>
+                  <a:lnTo>
+                    <a:pt x="1145960" y="3229536"/>
+                  </a:lnTo>
+                  <a:lnTo>
+                    <a:pt x="1074337" y="3240899"/>
+                  </a:lnTo>
+                  <a:lnTo>
+                    <a:pt x="1002715" y="3251755"/>
+                  </a:lnTo>
+                  <a:lnTo>
+                    <a:pt x="931092" y="3262125"/>
+                  </a:lnTo>
+                  <a:lnTo>
+                    <a:pt x="859470" y="3272032"/>
+                  </a:lnTo>
+                  <a:lnTo>
+                    <a:pt x="787847" y="3281496"/>
+                  </a:lnTo>
+                  <a:lnTo>
+                    <a:pt x="716225" y="3290537"/>
+                  </a:lnTo>
+                  <a:lnTo>
+                    <a:pt x="644602" y="3299174"/>
+                  </a:lnTo>
+                  <a:lnTo>
+                    <a:pt x="572980" y="3307424"/>
+                  </a:lnTo>
+                  <a:lnTo>
+                    <a:pt x="501357" y="3315306"/>
+                  </a:lnTo>
+                  <a:lnTo>
+                    <a:pt x="429735" y="3322836"/>
+                  </a:lnTo>
+                  <a:lnTo>
+                    <a:pt x="358112" y="3330029"/>
+                  </a:lnTo>
+                  <a:lnTo>
+                    <a:pt x="286490" y="3336900"/>
+                  </a:lnTo>
+                  <a:lnTo>
+                    <a:pt x="214867" y="3343464"/>
+                  </a:lnTo>
+                  <a:lnTo>
+                    <a:pt x="143245" y="3349735"/>
+                  </a:lnTo>
+                  <a:lnTo>
+                    <a:pt x="71622" y="3355726"/>
+                  </a:lnTo>
+                  <a:lnTo>
+                    <a:pt x="0" y="3361448"/>
                   </a:lnTo>
                   <a:close/>
                 </a:path>
@@ -3930,219 +3930,219 @@
           </p:nvSpPr>
           <p:spPr>
             <a:xfrm>
-              <a:off x="1655051" y="2073503"/>
-              <a:ext cx="4757783" cy="2646145"/>
+              <a:off x="1660920" y="2073503"/>
+              <a:ext cx="4756519" cy="2648957"/>
             </a:xfrm>
             <a:custGeom>
               <a:avLst/>
               <a:pathLst>
-                <a:path w="4757783" h="2646145">
+                <a:path w="4756519" h="2648957">
                   <a:moveTo>
                     <a:pt x="0" y="0"/>
                   </a:moveTo>
                   <a:lnTo>
-                    <a:pt x="18355" y="36922"/>
-                  </a:lnTo>
-                  <a:lnTo>
-                    <a:pt x="89977" y="175211"/>
-                  </a:lnTo>
-                  <a:lnTo>
-                    <a:pt x="161600" y="307952"/>
-                  </a:lnTo>
-                  <a:lnTo>
-                    <a:pt x="233222" y="435367"/>
-                  </a:lnTo>
-                  <a:lnTo>
-                    <a:pt x="304845" y="557671"/>
-                  </a:lnTo>
-                  <a:lnTo>
-                    <a:pt x="376468" y="675067"/>
-                  </a:lnTo>
-                  <a:lnTo>
-                    <a:pt x="448090" y="787753"/>
-                  </a:lnTo>
-                  <a:lnTo>
-                    <a:pt x="519713" y="895919"/>
-                  </a:lnTo>
-                  <a:lnTo>
-                    <a:pt x="591335" y="999745"/>
-                  </a:lnTo>
-                  <a:lnTo>
-                    <a:pt x="662958" y="1099405"/>
-                  </a:lnTo>
-                  <a:lnTo>
-                    <a:pt x="734580" y="1195066"/>
-                  </a:lnTo>
-                  <a:lnTo>
-                    <a:pt x="806203" y="1286890"/>
-                  </a:lnTo>
-                  <a:lnTo>
-                    <a:pt x="877825" y="1375030"/>
-                  </a:lnTo>
-                  <a:lnTo>
-                    <a:pt x="949448" y="1459633"/>
-                  </a:lnTo>
-                  <a:lnTo>
-                    <a:pt x="1021070" y="1540842"/>
-                  </a:lnTo>
-                  <a:lnTo>
-                    <a:pt x="1092693" y="1618793"/>
-                  </a:lnTo>
-                  <a:lnTo>
-                    <a:pt x="1164315" y="1693616"/>
-                  </a:lnTo>
-                  <a:lnTo>
-                    <a:pt x="1235938" y="1765438"/>
-                  </a:lnTo>
-                  <a:lnTo>
-                    <a:pt x="1307560" y="1834377"/>
-                  </a:lnTo>
-                  <a:lnTo>
-                    <a:pt x="1379183" y="1900551"/>
-                  </a:lnTo>
-                  <a:lnTo>
-                    <a:pt x="1450805" y="1964070"/>
-                  </a:lnTo>
-                  <a:lnTo>
-                    <a:pt x="1522428" y="2025041"/>
-                  </a:lnTo>
-                  <a:lnTo>
-                    <a:pt x="1594050" y="2083565"/>
-                  </a:lnTo>
-                  <a:lnTo>
-                    <a:pt x="1665673" y="2139742"/>
-                  </a:lnTo>
-                  <a:lnTo>
-                    <a:pt x="1737296" y="2193664"/>
-                  </a:lnTo>
-                  <a:lnTo>
-                    <a:pt x="1808918" y="2245423"/>
-                  </a:lnTo>
-                  <a:lnTo>
-                    <a:pt x="1880541" y="2295106"/>
-                  </a:lnTo>
-                  <a:lnTo>
-                    <a:pt x="1952163" y="2342795"/>
-                  </a:lnTo>
-                  <a:lnTo>
-                    <a:pt x="2023786" y="2388571"/>
-                  </a:lnTo>
-                  <a:lnTo>
-                    <a:pt x="2095408" y="2432510"/>
-                  </a:lnTo>
-                  <a:lnTo>
-                    <a:pt x="2167031" y="2474687"/>
-                  </a:lnTo>
-                  <a:lnTo>
-                    <a:pt x="2238653" y="2515171"/>
-                  </a:lnTo>
-                  <a:lnTo>
-                    <a:pt x="2310276" y="2554031"/>
-                  </a:lnTo>
-                  <a:lnTo>
-                    <a:pt x="2381898" y="2591332"/>
-                  </a:lnTo>
-                  <a:lnTo>
-                    <a:pt x="2453521" y="2627136"/>
-                  </a:lnTo>
-                  <a:lnTo>
-                    <a:pt x="2525143" y="2646145"/>
-                  </a:lnTo>
-                  <a:lnTo>
-                    <a:pt x="2596766" y="2606962"/>
-                  </a:lnTo>
-                  <a:lnTo>
-                    <a:pt x="2668388" y="2565946"/>
-                  </a:lnTo>
-                  <a:lnTo>
-                    <a:pt x="2740011" y="2523011"/>
-                  </a:lnTo>
-                  <a:lnTo>
-                    <a:pt x="2811633" y="2478067"/>
-                  </a:lnTo>
-                  <a:lnTo>
-                    <a:pt x="2883256" y="2431021"/>
-                  </a:lnTo>
-                  <a:lnTo>
-                    <a:pt x="2954878" y="2381774"/>
-                  </a:lnTo>
-                  <a:lnTo>
-                    <a:pt x="3026501" y="2330223"/>
-                  </a:lnTo>
-                  <a:lnTo>
-                    <a:pt x="3098124" y="2276261"/>
-                  </a:lnTo>
-                  <a:lnTo>
-                    <a:pt x="3169746" y="2219775"/>
-                  </a:lnTo>
-                  <a:lnTo>
-                    <a:pt x="3241369" y="2160646"/>
-                  </a:lnTo>
-                  <a:lnTo>
-                    <a:pt x="3312991" y="2098750"/>
-                  </a:lnTo>
-                  <a:lnTo>
-                    <a:pt x="3384614" y="2033960"/>
-                  </a:lnTo>
-                  <a:lnTo>
-                    <a:pt x="3456236" y="1966138"/>
-                  </a:lnTo>
-                  <a:lnTo>
-                    <a:pt x="3527859" y="1895144"/>
-                  </a:lnTo>
-                  <a:lnTo>
-                    <a:pt x="3599481" y="1820829"/>
-                  </a:lnTo>
-                  <a:lnTo>
-                    <a:pt x="3671104" y="1743037"/>
-                  </a:lnTo>
-                  <a:lnTo>
-                    <a:pt x="3742726" y="1661606"/>
-                  </a:lnTo>
-                  <a:lnTo>
-                    <a:pt x="3814349" y="1576365"/>
-                  </a:lnTo>
-                  <a:lnTo>
-                    <a:pt x="3885971" y="1487137"/>
-                  </a:lnTo>
-                  <a:lnTo>
-                    <a:pt x="3957594" y="1393735"/>
-                  </a:lnTo>
-                  <a:lnTo>
-                    <a:pt x="4029216" y="1295964"/>
-                  </a:lnTo>
-                  <a:lnTo>
-                    <a:pt x="4100839" y="1193618"/>
-                  </a:lnTo>
-                  <a:lnTo>
-                    <a:pt x="4172461" y="1086485"/>
-                  </a:lnTo>
-                  <a:lnTo>
-                    <a:pt x="4244084" y="974341"/>
-                  </a:lnTo>
-                  <a:lnTo>
-                    <a:pt x="4315706" y="856950"/>
-                  </a:lnTo>
-                  <a:lnTo>
-                    <a:pt x="4387329" y="734067"/>
-                  </a:lnTo>
-                  <a:lnTo>
-                    <a:pt x="4458952" y="605436"/>
-                  </a:lnTo>
-                  <a:lnTo>
-                    <a:pt x="4530574" y="470788"/>
-                  </a:lnTo>
-                  <a:lnTo>
-                    <a:pt x="4602197" y="329841"/>
-                  </a:lnTo>
-                  <a:lnTo>
-                    <a:pt x="4673819" y="182300"/>
-                  </a:lnTo>
-                  <a:lnTo>
-                    <a:pt x="4745442" y="27857"/>
-                  </a:lnTo>
-                  <a:lnTo>
-                    <a:pt x="4757783" y="0"/>
+                    <a:pt x="12486" y="25208"/>
+                  </a:lnTo>
+                  <a:lnTo>
+                    <a:pt x="84108" y="164003"/>
+                  </a:lnTo>
+                  <a:lnTo>
+                    <a:pt x="155731" y="297229"/>
+                  </a:lnTo>
+                  <a:lnTo>
+                    <a:pt x="227353" y="425107"/>
+                  </a:lnTo>
+                  <a:lnTo>
+                    <a:pt x="298976" y="547854"/>
+                  </a:lnTo>
+                  <a:lnTo>
+                    <a:pt x="370598" y="665675"/>
+                  </a:lnTo>
+                  <a:lnTo>
+                    <a:pt x="442221" y="778768"/>
+                  </a:lnTo>
+                  <a:lnTo>
+                    <a:pt x="513843" y="887322"/>
+                  </a:lnTo>
+                  <a:lnTo>
+                    <a:pt x="585466" y="991520"/>
+                  </a:lnTo>
+                  <a:lnTo>
+                    <a:pt x="657088" y="1091536"/>
+                  </a:lnTo>
+                  <a:lnTo>
+                    <a:pt x="728711" y="1187538"/>
+                  </a:lnTo>
+                  <a:lnTo>
+                    <a:pt x="800333" y="1279688"/>
+                  </a:lnTo>
+                  <a:lnTo>
+                    <a:pt x="871956" y="1368140"/>
+                  </a:lnTo>
+                  <a:lnTo>
+                    <a:pt x="943578" y="1453041"/>
+                  </a:lnTo>
+                  <a:lnTo>
+                    <a:pt x="1015201" y="1534536"/>
+                  </a:lnTo>
+                  <a:lnTo>
+                    <a:pt x="1086824" y="1612760"/>
+                  </a:lnTo>
+                  <a:lnTo>
+                    <a:pt x="1158446" y="1687845"/>
+                  </a:lnTo>
+                  <a:lnTo>
+                    <a:pt x="1230069" y="1759917"/>
+                  </a:lnTo>
+                  <a:lnTo>
+                    <a:pt x="1301691" y="1829097"/>
+                  </a:lnTo>
+                  <a:lnTo>
+                    <a:pt x="1373314" y="1895500"/>
+                  </a:lnTo>
+                  <a:lnTo>
+                    <a:pt x="1444936" y="1959238"/>
+                  </a:lnTo>
+                  <a:lnTo>
+                    <a:pt x="1516559" y="2020418"/>
+                  </a:lnTo>
+                  <a:lnTo>
+                    <a:pt x="1588181" y="2079144"/>
+                  </a:lnTo>
+                  <a:lnTo>
+                    <a:pt x="1659804" y="2135512"/>
+                  </a:lnTo>
+                  <a:lnTo>
+                    <a:pt x="1731426" y="2189618"/>
+                  </a:lnTo>
+                  <a:lnTo>
+                    <a:pt x="1803049" y="2241553"/>
+                  </a:lnTo>
+                  <a:lnTo>
+                    <a:pt x="1874671" y="2291404"/>
+                  </a:lnTo>
+                  <a:lnTo>
+                    <a:pt x="1946294" y="2339254"/>
+                  </a:lnTo>
+                  <a:lnTo>
+                    <a:pt x="2017916" y="2385184"/>
+                  </a:lnTo>
+                  <a:lnTo>
+                    <a:pt x="2089539" y="2429271"/>
+                  </a:lnTo>
+                  <a:lnTo>
+                    <a:pt x="2161161" y="2471588"/>
+                  </a:lnTo>
+                  <a:lnTo>
+                    <a:pt x="2232784" y="2512207"/>
+                  </a:lnTo>
+                  <a:lnTo>
+                    <a:pt x="2304406" y="2551196"/>
+                  </a:lnTo>
+                  <a:lnTo>
+                    <a:pt x="2376029" y="2588621"/>
+                  </a:lnTo>
+                  <a:lnTo>
+                    <a:pt x="2447652" y="2624543"/>
+                  </a:lnTo>
+                  <a:lnTo>
+                    <a:pt x="2519274" y="2648957"/>
+                  </a:lnTo>
+                  <a:lnTo>
+                    <a:pt x="2590897" y="2609894"/>
+                  </a:lnTo>
+                  <a:lnTo>
+                    <a:pt x="2662519" y="2569004"/>
+                  </a:lnTo>
+                  <a:lnTo>
+                    <a:pt x="2734142" y="2526200"/>
+                  </a:lnTo>
+                  <a:lnTo>
+                    <a:pt x="2805764" y="2481394"/>
+                  </a:lnTo>
+                  <a:lnTo>
+                    <a:pt x="2877387" y="2434490"/>
+                  </a:lnTo>
+                  <a:lnTo>
+                    <a:pt x="2949009" y="2385392"/>
+                  </a:lnTo>
+                  <a:lnTo>
+                    <a:pt x="3020632" y="2333997"/>
+                  </a:lnTo>
+                  <a:lnTo>
+                    <a:pt x="3092254" y="2280197"/>
+                  </a:lnTo>
+                  <a:lnTo>
+                    <a:pt x="3163877" y="2223879"/>
+                  </a:lnTo>
+                  <a:lnTo>
+                    <a:pt x="3235499" y="2164925"/>
+                  </a:lnTo>
+                  <a:lnTo>
+                    <a:pt x="3307122" y="2103213"/>
+                  </a:lnTo>
+                  <a:lnTo>
+                    <a:pt x="3378744" y="2038614"/>
+                  </a:lnTo>
+                  <a:lnTo>
+                    <a:pt x="3450367" y="1970992"/>
+                  </a:lnTo>
+                  <a:lnTo>
+                    <a:pt x="3521989" y="1900205"/>
+                  </a:lnTo>
+                  <a:lnTo>
+                    <a:pt x="3593612" y="1826106"/>
+                  </a:lnTo>
+                  <a:lnTo>
+                    <a:pt x="3665234" y="1748540"/>
+                  </a:lnTo>
+                  <a:lnTo>
+                    <a:pt x="3736857" y="1667344"/>
+                  </a:lnTo>
+                  <a:lnTo>
+                    <a:pt x="3808480" y="1582349"/>
+                  </a:lnTo>
+                  <a:lnTo>
+                    <a:pt x="3880102" y="1493376"/>
+                  </a:lnTo>
+                  <a:lnTo>
+                    <a:pt x="3951725" y="1400240"/>
+                  </a:lnTo>
+                  <a:lnTo>
+                    <a:pt x="4023347" y="1302746"/>
+                  </a:lnTo>
+                  <a:lnTo>
+                    <a:pt x="4094970" y="1200690"/>
+                  </a:lnTo>
+                  <a:lnTo>
+                    <a:pt x="4166592" y="1093859"/>
+                  </a:lnTo>
+                  <a:lnTo>
+                    <a:pt x="4238215" y="982028"/>
+                  </a:lnTo>
+                  <a:lnTo>
+                    <a:pt x="4309837" y="864965"/>
+                  </a:lnTo>
+                  <a:lnTo>
+                    <a:pt x="4381460" y="742424"/>
+                  </a:lnTo>
+                  <a:lnTo>
+                    <a:pt x="4453082" y="614149"/>
+                  </a:lnTo>
+                  <a:lnTo>
+                    <a:pt x="4524705" y="479871"/>
+                  </a:lnTo>
+                  <a:lnTo>
+                    <a:pt x="4596327" y="339310"/>
+                  </a:lnTo>
+                  <a:lnTo>
+                    <a:pt x="4667950" y="192172"/>
+                  </a:lnTo>
+                  <a:lnTo>
+                    <a:pt x="4739572" y="38149"/>
+                  </a:lnTo>
+                  <a:lnTo>
+                    <a:pt x="4756519" y="0"/>
                   </a:lnTo>
                 </a:path>
               </a:pathLst>
@@ -4162,312 +4162,312 @@
           </p:nvSpPr>
           <p:spPr>
             <a:xfrm>
-              <a:off x="1172049" y="4735007"/>
-              <a:ext cx="7090630" cy="742563"/>
+              <a:off x="1172049" y="4732527"/>
+              <a:ext cx="7090630" cy="744852"/>
             </a:xfrm>
             <a:custGeom>
               <a:avLst/>
               <a:pathLst>
-                <a:path w="7090630" h="742563">
+                <a:path w="7090630" h="744852">
                   <a:moveTo>
-                    <a:pt x="7090630" y="742563"/>
+                    <a:pt x="7090630" y="744852"/>
                   </a:moveTo>
                   <a:lnTo>
-                    <a:pt x="7019007" y="739232"/>
-                  </a:lnTo>
-                  <a:lnTo>
-                    <a:pt x="6947385" y="735763"/>
-                  </a:lnTo>
-                  <a:lnTo>
-                    <a:pt x="6875762" y="732148"/>
-                  </a:lnTo>
-                  <a:lnTo>
-                    <a:pt x="6804139" y="728382"/>
-                  </a:lnTo>
-                  <a:lnTo>
-                    <a:pt x="6732517" y="724459"/>
-                  </a:lnTo>
-                  <a:lnTo>
-                    <a:pt x="6660894" y="720372"/>
-                  </a:lnTo>
-                  <a:lnTo>
-                    <a:pt x="6589272" y="716114"/>
-                  </a:lnTo>
-                  <a:lnTo>
-                    <a:pt x="6517649" y="711678"/>
-                  </a:lnTo>
-                  <a:lnTo>
-                    <a:pt x="6446027" y="707057"/>
-                  </a:lnTo>
-                  <a:lnTo>
-                    <a:pt x="6374404" y="702242"/>
-                  </a:lnTo>
-                  <a:lnTo>
-                    <a:pt x="6302782" y="697227"/>
-                  </a:lnTo>
-                  <a:lnTo>
-                    <a:pt x="6231159" y="692001"/>
-                  </a:lnTo>
-                  <a:lnTo>
-                    <a:pt x="6159537" y="686557"/>
-                  </a:lnTo>
-                  <a:lnTo>
-                    <a:pt x="6087914" y="680886"/>
-                  </a:lnTo>
-                  <a:lnTo>
-                    <a:pt x="6016292" y="674978"/>
-                  </a:lnTo>
-                  <a:lnTo>
-                    <a:pt x="5944669" y="668823"/>
-                  </a:lnTo>
-                  <a:lnTo>
-                    <a:pt x="5873047" y="662410"/>
-                  </a:lnTo>
-                  <a:lnTo>
-                    <a:pt x="5801424" y="655729"/>
-                  </a:lnTo>
-                  <a:lnTo>
-                    <a:pt x="5729802" y="648769"/>
-                  </a:lnTo>
-                  <a:lnTo>
-                    <a:pt x="5658179" y="641519"/>
-                  </a:lnTo>
-                  <a:lnTo>
-                    <a:pt x="5586557" y="633965"/>
-                  </a:lnTo>
-                  <a:lnTo>
-                    <a:pt x="5514934" y="626095"/>
-                  </a:lnTo>
-                  <a:lnTo>
-                    <a:pt x="5443311" y="617897"/>
-                  </a:lnTo>
-                  <a:lnTo>
-                    <a:pt x="5371689" y="609356"/>
-                  </a:lnTo>
-                  <a:lnTo>
-                    <a:pt x="5300066" y="600458"/>
-                  </a:lnTo>
-                  <a:lnTo>
-                    <a:pt x="5228444" y="591188"/>
-                  </a:lnTo>
-                  <a:lnTo>
-                    <a:pt x="5156821" y="581530"/>
-                  </a:lnTo>
-                  <a:lnTo>
-                    <a:pt x="5085199" y="571469"/>
-                  </a:lnTo>
-                  <a:lnTo>
-                    <a:pt x="5013576" y="560987"/>
-                  </a:lnTo>
-                  <a:lnTo>
-                    <a:pt x="4941954" y="550067"/>
-                  </a:lnTo>
-                  <a:lnTo>
-                    <a:pt x="4870331" y="538691"/>
-                  </a:lnTo>
-                  <a:lnTo>
-                    <a:pt x="4798709" y="526839"/>
-                  </a:lnTo>
-                  <a:lnTo>
-                    <a:pt x="4727086" y="514492"/>
-                  </a:lnTo>
-                  <a:lnTo>
-                    <a:pt x="4655464" y="501629"/>
-                  </a:lnTo>
-                  <a:lnTo>
-                    <a:pt x="4583841" y="488228"/>
-                  </a:lnTo>
-                  <a:lnTo>
-                    <a:pt x="4512219" y="474267"/>
-                  </a:lnTo>
-                  <a:lnTo>
-                    <a:pt x="4440596" y="459722"/>
-                  </a:lnTo>
-                  <a:lnTo>
-                    <a:pt x="4368974" y="444570"/>
-                  </a:lnTo>
-                  <a:lnTo>
-                    <a:pt x="4297351" y="428784"/>
-                  </a:lnTo>
-                  <a:lnTo>
-                    <a:pt x="4225729" y="412338"/>
-                  </a:lnTo>
-                  <a:lnTo>
-                    <a:pt x="4154106" y="395205"/>
-                  </a:lnTo>
-                  <a:lnTo>
-                    <a:pt x="4082483" y="377356"/>
-                  </a:lnTo>
-                  <a:lnTo>
-                    <a:pt x="4010861" y="358761"/>
-                  </a:lnTo>
-                  <a:lnTo>
-                    <a:pt x="3939238" y="339388"/>
-                  </a:lnTo>
-                  <a:lnTo>
-                    <a:pt x="3867616" y="319206"/>
-                  </a:lnTo>
-                  <a:lnTo>
-                    <a:pt x="3795993" y="298180"/>
-                  </a:lnTo>
-                  <a:lnTo>
-                    <a:pt x="3724371" y="276276"/>
-                  </a:lnTo>
-                  <a:lnTo>
-                    <a:pt x="3652748" y="253456"/>
-                  </a:lnTo>
-                  <a:lnTo>
-                    <a:pt x="3581126" y="229682"/>
-                  </a:lnTo>
-                  <a:lnTo>
-                    <a:pt x="3509503" y="204914"/>
-                  </a:lnTo>
-                  <a:lnTo>
-                    <a:pt x="3437881" y="179111"/>
-                  </a:lnTo>
-                  <a:lnTo>
-                    <a:pt x="3366258" y="152230"/>
-                  </a:lnTo>
-                  <a:lnTo>
-                    <a:pt x="3294636" y="124225"/>
-                  </a:lnTo>
-                  <a:lnTo>
-                    <a:pt x="3223013" y="95049"/>
-                  </a:lnTo>
-                  <a:lnTo>
-                    <a:pt x="3151391" y="64654"/>
-                  </a:lnTo>
-                  <a:lnTo>
-                    <a:pt x="3079768" y="32989"/>
+                    <a:pt x="7019007" y="741512"/>
+                  </a:lnTo>
+                  <a:lnTo>
+                    <a:pt x="6947385" y="738034"/>
+                  </a:lnTo>
+                  <a:lnTo>
+                    <a:pt x="6875762" y="734409"/>
+                  </a:lnTo>
+                  <a:lnTo>
+                    <a:pt x="6804139" y="730633"/>
+                  </a:lnTo>
+                  <a:lnTo>
+                    <a:pt x="6732517" y="726700"/>
+                  </a:lnTo>
+                  <a:lnTo>
+                    <a:pt x="6660894" y="722601"/>
+                  </a:lnTo>
+                  <a:lnTo>
+                    <a:pt x="6589272" y="718332"/>
+                  </a:lnTo>
+                  <a:lnTo>
+                    <a:pt x="6517649" y="713884"/>
+                  </a:lnTo>
+                  <a:lnTo>
+                    <a:pt x="6446027" y="709250"/>
+                  </a:lnTo>
+                  <a:lnTo>
+                    <a:pt x="6374404" y="704422"/>
+                  </a:lnTo>
+                  <a:lnTo>
+                    <a:pt x="6302782" y="699392"/>
+                  </a:lnTo>
+                  <a:lnTo>
+                    <a:pt x="6231159" y="694152"/>
+                  </a:lnTo>
+                  <a:lnTo>
+                    <a:pt x="6159537" y="688693"/>
+                  </a:lnTo>
+                  <a:lnTo>
+                    <a:pt x="6087914" y="683006"/>
+                  </a:lnTo>
+                  <a:lnTo>
+                    <a:pt x="6016292" y="677081"/>
+                  </a:lnTo>
+                  <a:lnTo>
+                    <a:pt x="5944669" y="670908"/>
+                  </a:lnTo>
+                  <a:lnTo>
+                    <a:pt x="5873047" y="664478"/>
+                  </a:lnTo>
+                  <a:lnTo>
+                    <a:pt x="5801424" y="657778"/>
+                  </a:lnTo>
+                  <a:lnTo>
+                    <a:pt x="5729802" y="650798"/>
+                  </a:lnTo>
+                  <a:lnTo>
+                    <a:pt x="5658179" y="643527"/>
+                  </a:lnTo>
+                  <a:lnTo>
+                    <a:pt x="5586557" y="635951"/>
+                  </a:lnTo>
+                  <a:lnTo>
+                    <a:pt x="5514934" y="628059"/>
+                  </a:lnTo>
+                  <a:lnTo>
+                    <a:pt x="5443311" y="619836"/>
+                  </a:lnTo>
+                  <a:lnTo>
+                    <a:pt x="5371689" y="611270"/>
+                  </a:lnTo>
+                  <a:lnTo>
+                    <a:pt x="5300066" y="602346"/>
+                  </a:lnTo>
+                  <a:lnTo>
+                    <a:pt x="5228444" y="593049"/>
+                  </a:lnTo>
+                  <a:lnTo>
+                    <a:pt x="5156821" y="583363"/>
+                  </a:lnTo>
+                  <a:lnTo>
+                    <a:pt x="5085199" y="573272"/>
+                  </a:lnTo>
+                  <a:lnTo>
+                    <a:pt x="5013576" y="562759"/>
+                  </a:lnTo>
+                  <a:lnTo>
+                    <a:pt x="4941954" y="551806"/>
+                  </a:lnTo>
+                  <a:lnTo>
+                    <a:pt x="4870331" y="540396"/>
+                  </a:lnTo>
+                  <a:lnTo>
+                    <a:pt x="4798709" y="528509"/>
+                  </a:lnTo>
+                  <a:lnTo>
+                    <a:pt x="4727086" y="516124"/>
+                  </a:lnTo>
+                  <a:lnTo>
+                    <a:pt x="4655464" y="503222"/>
+                  </a:lnTo>
+                  <a:lnTo>
+                    <a:pt x="4583841" y="489781"/>
+                  </a:lnTo>
+                  <a:lnTo>
+                    <a:pt x="4512219" y="475777"/>
+                  </a:lnTo>
+                  <a:lnTo>
+                    <a:pt x="4440596" y="461188"/>
+                  </a:lnTo>
+                  <a:lnTo>
+                    <a:pt x="4368974" y="445989"/>
+                  </a:lnTo>
+                  <a:lnTo>
+                    <a:pt x="4297351" y="430154"/>
+                  </a:lnTo>
+                  <a:lnTo>
+                    <a:pt x="4225729" y="413658"/>
+                  </a:lnTo>
+                  <a:lnTo>
+                    <a:pt x="4154106" y="396472"/>
+                  </a:lnTo>
+                  <a:lnTo>
+                    <a:pt x="4082483" y="378567"/>
+                  </a:lnTo>
+                  <a:lnTo>
+                    <a:pt x="4010861" y="359914"/>
+                  </a:lnTo>
+                  <a:lnTo>
+                    <a:pt x="3939238" y="340480"/>
+                  </a:lnTo>
+                  <a:lnTo>
+                    <a:pt x="3867616" y="320235"/>
+                  </a:lnTo>
+                  <a:lnTo>
+                    <a:pt x="3795993" y="299143"/>
+                  </a:lnTo>
+                  <a:lnTo>
+                    <a:pt x="3724371" y="277169"/>
+                  </a:lnTo>
+                  <a:lnTo>
+                    <a:pt x="3652748" y="254276"/>
+                  </a:lnTo>
+                  <a:lnTo>
+                    <a:pt x="3581126" y="230426"/>
+                  </a:lnTo>
+                  <a:lnTo>
+                    <a:pt x="3509503" y="205579"/>
+                  </a:lnTo>
+                  <a:lnTo>
+                    <a:pt x="3437881" y="179693"/>
+                  </a:lnTo>
+                  <a:lnTo>
+                    <a:pt x="3366258" y="152725"/>
+                  </a:lnTo>
+                  <a:lnTo>
+                    <a:pt x="3294636" y="124630"/>
+                  </a:lnTo>
+                  <a:lnTo>
+                    <a:pt x="3223013" y="95359"/>
+                  </a:lnTo>
+                  <a:lnTo>
+                    <a:pt x="3151391" y="64866"/>
+                  </a:lnTo>
+                  <a:lnTo>
+                    <a:pt x="3079768" y="33097"/>
                   </a:lnTo>
                   <a:lnTo>
                     <a:pt x="3008146" y="0"/>
                   </a:lnTo>
                   <a:lnTo>
-                    <a:pt x="2936523" y="22073"/>
-                  </a:lnTo>
-                  <a:lnTo>
-                    <a:pt x="2864901" y="57832"/>
-                  </a:lnTo>
-                  <a:lnTo>
-                    <a:pt x="2793278" y="91993"/>
-                  </a:lnTo>
-                  <a:lnTo>
-                    <a:pt x="2721655" y="124628"/>
-                  </a:lnTo>
-                  <a:lnTo>
-                    <a:pt x="2650033" y="155804"/>
-                  </a:lnTo>
-                  <a:lnTo>
-                    <a:pt x="2578410" y="185587"/>
-                  </a:lnTo>
-                  <a:lnTo>
-                    <a:pt x="2506788" y="214039"/>
-                  </a:lnTo>
-                  <a:lnTo>
-                    <a:pt x="2435165" y="241220"/>
-                  </a:lnTo>
-                  <a:lnTo>
-                    <a:pt x="2363543" y="267185"/>
-                  </a:lnTo>
-                  <a:lnTo>
-                    <a:pt x="2291920" y="291991"/>
-                  </a:lnTo>
-                  <a:lnTo>
-                    <a:pt x="2220298" y="315687"/>
-                  </a:lnTo>
-                  <a:lnTo>
-                    <a:pt x="2148675" y="338325"/>
-                  </a:lnTo>
-                  <a:lnTo>
-                    <a:pt x="2077053" y="359951"/>
-                  </a:lnTo>
-                  <a:lnTo>
-                    <a:pt x="2005430" y="380611"/>
-                  </a:lnTo>
-                  <a:lnTo>
-                    <a:pt x="1933808" y="400347"/>
-                  </a:lnTo>
-                  <a:lnTo>
-                    <a:pt x="1862185" y="419202"/>
-                  </a:lnTo>
-                  <a:lnTo>
-                    <a:pt x="1790563" y="437214"/>
-                  </a:lnTo>
-                  <a:lnTo>
-                    <a:pt x="1718940" y="454420"/>
-                  </a:lnTo>
-                  <a:lnTo>
-                    <a:pt x="1647318" y="470858"/>
-                  </a:lnTo>
-                  <a:lnTo>
-                    <a:pt x="1575695" y="486561"/>
-                  </a:lnTo>
-                  <a:lnTo>
-                    <a:pt x="1504073" y="501563"/>
-                  </a:lnTo>
-                  <a:lnTo>
-                    <a:pt x="1432450" y="515894"/>
-                  </a:lnTo>
-                  <a:lnTo>
-                    <a:pt x="1360827" y="529585"/>
-                  </a:lnTo>
-                  <a:lnTo>
-                    <a:pt x="1289205" y="542663"/>
-                  </a:lnTo>
-                  <a:lnTo>
-                    <a:pt x="1217582" y="555158"/>
-                  </a:lnTo>
-                  <a:lnTo>
-                    <a:pt x="1145960" y="567094"/>
-                  </a:lnTo>
-                  <a:lnTo>
-                    <a:pt x="1074337" y="578496"/>
-                  </a:lnTo>
-                  <a:lnTo>
-                    <a:pt x="1002715" y="589389"/>
-                  </a:lnTo>
-                  <a:lnTo>
-                    <a:pt x="931092" y="599795"/>
-                  </a:lnTo>
-                  <a:lnTo>
-                    <a:pt x="859470" y="609736"/>
-                  </a:lnTo>
-                  <a:lnTo>
-                    <a:pt x="787847" y="619233"/>
-                  </a:lnTo>
-                  <a:lnTo>
-                    <a:pt x="716225" y="628306"/>
-                  </a:lnTo>
-                  <a:lnTo>
-                    <a:pt x="644602" y="636972"/>
-                  </a:lnTo>
-                  <a:lnTo>
-                    <a:pt x="572980" y="645252"/>
-                  </a:lnTo>
-                  <a:lnTo>
-                    <a:pt x="501357" y="653162"/>
-                  </a:lnTo>
-                  <a:lnTo>
-                    <a:pt x="429735" y="660718"/>
-                  </a:lnTo>
-                  <a:lnTo>
-                    <a:pt x="358112" y="667936"/>
-                  </a:lnTo>
-                  <a:lnTo>
-                    <a:pt x="286490" y="674832"/>
-                  </a:lnTo>
-                  <a:lnTo>
-                    <a:pt x="214867" y="681420"/>
-                  </a:lnTo>
-                  <a:lnTo>
-                    <a:pt x="143245" y="687713"/>
-                  </a:lnTo>
-                  <a:lnTo>
-                    <a:pt x="71622" y="693725"/>
-                  </a:lnTo>
-                  <a:lnTo>
-                    <a:pt x="0" y="699469"/>
+                    <a:pt x="2936523" y="27249"/>
+                  </a:lnTo>
+                  <a:lnTo>
+                    <a:pt x="2864901" y="62897"/>
+                  </a:lnTo>
+                  <a:lnTo>
+                    <a:pt x="2793278" y="96952"/>
+                  </a:lnTo>
+                  <a:lnTo>
+                    <a:pt x="2721655" y="129484"/>
+                  </a:lnTo>
+                  <a:lnTo>
+                    <a:pt x="2650033" y="160562"/>
+                  </a:lnTo>
+                  <a:lnTo>
+                    <a:pt x="2578410" y="190251"/>
+                  </a:lnTo>
+                  <a:lnTo>
+                    <a:pt x="2506788" y="218613"/>
+                  </a:lnTo>
+                  <a:lnTo>
+                    <a:pt x="2435165" y="245707"/>
+                  </a:lnTo>
+                  <a:lnTo>
+                    <a:pt x="2363543" y="271590"/>
+                  </a:lnTo>
+                  <a:lnTo>
+                    <a:pt x="2291920" y="296315"/>
+                  </a:lnTo>
+                  <a:lnTo>
+                    <a:pt x="2220298" y="319936"/>
+                  </a:lnTo>
+                  <a:lnTo>
+                    <a:pt x="2148675" y="342501"/>
+                  </a:lnTo>
+                  <a:lnTo>
+                    <a:pt x="2077053" y="364057"/>
+                  </a:lnTo>
+                  <a:lnTo>
+                    <a:pt x="2005430" y="384649"/>
+                  </a:lnTo>
+                  <a:lnTo>
+                    <a:pt x="1933808" y="404321"/>
+                  </a:lnTo>
+                  <a:lnTo>
+                    <a:pt x="1862185" y="423113"/>
+                  </a:lnTo>
+                  <a:lnTo>
+                    <a:pt x="1790563" y="441066"/>
+                  </a:lnTo>
+                  <a:lnTo>
+                    <a:pt x="1718940" y="458216"/>
+                  </a:lnTo>
+                  <a:lnTo>
+                    <a:pt x="1647318" y="474599"/>
+                  </a:lnTo>
+                  <a:lnTo>
+                    <a:pt x="1575695" y="490250"/>
+                  </a:lnTo>
+                  <a:lnTo>
+                    <a:pt x="1504073" y="505202"/>
+                  </a:lnTo>
+                  <a:lnTo>
+                    <a:pt x="1432450" y="519485"/>
+                  </a:lnTo>
+                  <a:lnTo>
+                    <a:pt x="1360827" y="533129"/>
+                  </a:lnTo>
+                  <a:lnTo>
+                    <a:pt x="1289205" y="546164"/>
+                  </a:lnTo>
+                  <a:lnTo>
+                    <a:pt x="1217582" y="558616"/>
+                  </a:lnTo>
+                  <a:lnTo>
+                    <a:pt x="1145960" y="570511"/>
+                  </a:lnTo>
+                  <a:lnTo>
+                    <a:pt x="1074337" y="581875"/>
+                  </a:lnTo>
+                  <a:lnTo>
+                    <a:pt x="1002715" y="592730"/>
+                  </a:lnTo>
+                  <a:lnTo>
+                    <a:pt x="931092" y="603101"/>
+                  </a:lnTo>
+                  <a:lnTo>
+                    <a:pt x="859470" y="613007"/>
+                  </a:lnTo>
+                  <a:lnTo>
+                    <a:pt x="787847" y="622471"/>
+                  </a:lnTo>
+                  <a:lnTo>
+                    <a:pt x="716225" y="631512"/>
+                  </a:lnTo>
+                  <a:lnTo>
+                    <a:pt x="644602" y="640149"/>
+                  </a:lnTo>
+                  <a:lnTo>
+                    <a:pt x="572980" y="648400"/>
+                  </a:lnTo>
+                  <a:lnTo>
+                    <a:pt x="501357" y="656282"/>
+                  </a:lnTo>
+                  <a:lnTo>
+                    <a:pt x="429735" y="663811"/>
+                  </a:lnTo>
+                  <a:lnTo>
+                    <a:pt x="358112" y="671004"/>
+                  </a:lnTo>
+                  <a:lnTo>
+                    <a:pt x="286490" y="677875"/>
+                  </a:lnTo>
+                  <a:lnTo>
+                    <a:pt x="214867" y="684440"/>
+                  </a:lnTo>
+                  <a:lnTo>
+                    <a:pt x="143245" y="690711"/>
+                  </a:lnTo>
+                  <a:lnTo>
+                    <a:pt x="71622" y="696701"/>
+                  </a:lnTo>
+                  <a:lnTo>
+                    <a:pt x="0" y="702424"/>
                   </a:lnTo>
                 </a:path>
               </a:pathLst>
@@ -4487,306 +4487,306 @@
           </p:nvSpPr>
           <p:spPr>
             <a:xfrm>
-              <a:off x="1172049" y="4606481"/>
-              <a:ext cx="7090630" cy="200005"/>
+              <a:off x="1172049" y="4606610"/>
+              <a:ext cx="7090630" cy="200028"/>
             </a:xfrm>
             <a:custGeom>
               <a:avLst/>
               <a:pathLst>
-                <a:path w="7090630" h="200005">
+                <a:path w="7090630" h="200028">
                   <a:moveTo>
-                    <a:pt x="0" y="200005"/>
+                    <a:pt x="0" y="200028"/>
                   </a:moveTo>
                   <a:lnTo>
-                    <a:pt x="71622" y="198212"/>
-                  </a:lnTo>
-                  <a:lnTo>
-                    <a:pt x="143245" y="196414"/>
-                  </a:lnTo>
-                  <a:lnTo>
-                    <a:pt x="214867" y="194612"/>
-                  </a:lnTo>
-                  <a:lnTo>
-                    <a:pt x="286490" y="192806"/>
-                  </a:lnTo>
-                  <a:lnTo>
-                    <a:pt x="358112" y="190996"/>
-                  </a:lnTo>
-                  <a:lnTo>
-                    <a:pt x="429735" y="189181"/>
-                  </a:lnTo>
-                  <a:lnTo>
-                    <a:pt x="501357" y="187362"/>
-                  </a:lnTo>
-                  <a:lnTo>
-                    <a:pt x="572980" y="185539"/>
-                  </a:lnTo>
-                  <a:lnTo>
-                    <a:pt x="644602" y="183711"/>
-                  </a:lnTo>
-                  <a:lnTo>
-                    <a:pt x="716225" y="181879"/>
-                  </a:lnTo>
-                  <a:lnTo>
-                    <a:pt x="787847" y="180042"/>
-                  </a:lnTo>
-                  <a:lnTo>
-                    <a:pt x="859470" y="178201"/>
-                  </a:lnTo>
-                  <a:lnTo>
-                    <a:pt x="931092" y="176356"/>
-                  </a:lnTo>
-                  <a:lnTo>
-                    <a:pt x="1002715" y="174506"/>
-                  </a:lnTo>
-                  <a:lnTo>
-                    <a:pt x="1074337" y="172652"/>
-                  </a:lnTo>
-                  <a:lnTo>
-                    <a:pt x="1145960" y="170794"/>
-                  </a:lnTo>
-                  <a:lnTo>
-                    <a:pt x="1217582" y="168931"/>
-                  </a:lnTo>
-                  <a:lnTo>
-                    <a:pt x="1289205" y="167063"/>
-                  </a:lnTo>
-                  <a:lnTo>
-                    <a:pt x="1360827" y="165191"/>
-                  </a:lnTo>
-                  <a:lnTo>
-                    <a:pt x="1432450" y="163315"/>
-                  </a:lnTo>
-                  <a:lnTo>
-                    <a:pt x="1504073" y="161434"/>
-                  </a:lnTo>
-                  <a:lnTo>
-                    <a:pt x="1575695" y="159549"/>
-                  </a:lnTo>
-                  <a:lnTo>
-                    <a:pt x="1647318" y="157659"/>
-                  </a:lnTo>
-                  <a:lnTo>
-                    <a:pt x="1718940" y="155765"/>
-                  </a:lnTo>
-                  <a:lnTo>
-                    <a:pt x="1790563" y="153866"/>
-                  </a:lnTo>
-                  <a:lnTo>
-                    <a:pt x="1862185" y="151962"/>
-                  </a:lnTo>
-                  <a:lnTo>
-                    <a:pt x="1933808" y="150055"/>
-                  </a:lnTo>
-                  <a:lnTo>
-                    <a:pt x="2005430" y="148142"/>
-                  </a:lnTo>
-                  <a:lnTo>
-                    <a:pt x="2077053" y="146225"/>
-                  </a:lnTo>
-                  <a:lnTo>
-                    <a:pt x="2148675" y="144303"/>
-                  </a:lnTo>
-                  <a:lnTo>
-                    <a:pt x="2220298" y="142377"/>
-                  </a:lnTo>
-                  <a:lnTo>
-                    <a:pt x="2291920" y="140446"/>
-                  </a:lnTo>
-                  <a:lnTo>
-                    <a:pt x="2363543" y="138511"/>
-                  </a:lnTo>
-                  <a:lnTo>
-                    <a:pt x="2435165" y="136571"/>
-                  </a:lnTo>
-                  <a:lnTo>
-                    <a:pt x="2506788" y="134626"/>
-                  </a:lnTo>
-                  <a:lnTo>
-                    <a:pt x="2578410" y="132677"/>
-                  </a:lnTo>
-                  <a:lnTo>
-                    <a:pt x="2650033" y="130723"/>
-                  </a:lnTo>
-                  <a:lnTo>
-                    <a:pt x="2721655" y="128764"/>
-                  </a:lnTo>
-                  <a:lnTo>
-                    <a:pt x="2793278" y="126801"/>
-                  </a:lnTo>
-                  <a:lnTo>
-                    <a:pt x="2864901" y="124832"/>
-                  </a:lnTo>
-                  <a:lnTo>
-                    <a:pt x="2936523" y="122860"/>
-                  </a:lnTo>
-                  <a:lnTo>
-                    <a:pt x="3008146" y="120882"/>
-                  </a:lnTo>
-                  <a:lnTo>
-                    <a:pt x="3079768" y="118900"/>
-                  </a:lnTo>
-                  <a:lnTo>
-                    <a:pt x="3151391" y="116913"/>
-                  </a:lnTo>
-                  <a:lnTo>
-                    <a:pt x="3223013" y="114921"/>
-                  </a:lnTo>
-                  <a:lnTo>
-                    <a:pt x="3294636" y="112925"/>
-                  </a:lnTo>
-                  <a:lnTo>
-                    <a:pt x="3366258" y="110924"/>
-                  </a:lnTo>
-                  <a:lnTo>
-                    <a:pt x="3437881" y="108918"/>
-                  </a:lnTo>
-                  <a:lnTo>
-                    <a:pt x="3509503" y="106907"/>
-                  </a:lnTo>
-                  <a:lnTo>
-                    <a:pt x="3581126" y="104892"/>
-                  </a:lnTo>
-                  <a:lnTo>
-                    <a:pt x="3652748" y="102871"/>
-                  </a:lnTo>
-                  <a:lnTo>
-                    <a:pt x="3724371" y="100846"/>
-                  </a:lnTo>
-                  <a:lnTo>
-                    <a:pt x="3795993" y="98816"/>
-                  </a:lnTo>
-                  <a:lnTo>
-                    <a:pt x="3867616" y="96781"/>
-                  </a:lnTo>
-                  <a:lnTo>
-                    <a:pt x="3939238" y="94741"/>
-                  </a:lnTo>
-                  <a:lnTo>
-                    <a:pt x="4010861" y="92697"/>
-                  </a:lnTo>
-                  <a:lnTo>
-                    <a:pt x="4082483" y="90647"/>
-                  </a:lnTo>
-                  <a:lnTo>
-                    <a:pt x="4154106" y="88593"/>
-                  </a:lnTo>
-                  <a:lnTo>
-                    <a:pt x="4225729" y="86533"/>
-                  </a:lnTo>
-                  <a:lnTo>
-                    <a:pt x="4297351" y="84469"/>
-                  </a:lnTo>
-                  <a:lnTo>
-                    <a:pt x="4368974" y="82400"/>
-                  </a:lnTo>
-                  <a:lnTo>
-                    <a:pt x="4440596" y="80326"/>
-                  </a:lnTo>
-                  <a:lnTo>
-                    <a:pt x="4512219" y="78247"/>
-                  </a:lnTo>
-                  <a:lnTo>
-                    <a:pt x="4583841" y="76163"/>
-                  </a:lnTo>
-                  <a:lnTo>
-                    <a:pt x="4655464" y="74074"/>
-                  </a:lnTo>
-                  <a:lnTo>
-                    <a:pt x="4727086" y="71980"/>
-                  </a:lnTo>
-                  <a:lnTo>
-                    <a:pt x="4798709" y="69881"/>
-                  </a:lnTo>
-                  <a:lnTo>
-                    <a:pt x="4870331" y="67777"/>
-                  </a:lnTo>
-                  <a:lnTo>
-                    <a:pt x="4941954" y="65668"/>
-                  </a:lnTo>
-                  <a:lnTo>
-                    <a:pt x="5013576" y="63554"/>
-                  </a:lnTo>
-                  <a:lnTo>
-                    <a:pt x="5085199" y="61435"/>
-                  </a:lnTo>
-                  <a:lnTo>
-                    <a:pt x="5156821" y="59310"/>
-                  </a:lnTo>
-                  <a:lnTo>
-                    <a:pt x="5228444" y="57181"/>
-                  </a:lnTo>
-                  <a:lnTo>
-                    <a:pt x="5300066" y="55047"/>
-                  </a:lnTo>
-                  <a:lnTo>
-                    <a:pt x="5371689" y="52907"/>
-                  </a:lnTo>
-                  <a:lnTo>
-                    <a:pt x="5443311" y="50763"/>
-                  </a:lnTo>
-                  <a:lnTo>
-                    <a:pt x="5514934" y="48613"/>
-                  </a:lnTo>
-                  <a:lnTo>
-                    <a:pt x="5586557" y="46458"/>
-                  </a:lnTo>
-                  <a:lnTo>
-                    <a:pt x="5658179" y="44298"/>
-                  </a:lnTo>
-                  <a:lnTo>
-                    <a:pt x="5729802" y="42133"/>
-                  </a:lnTo>
-                  <a:lnTo>
-                    <a:pt x="5801424" y="39963"/>
-                  </a:lnTo>
-                  <a:lnTo>
-                    <a:pt x="5873047" y="37788"/>
-                  </a:lnTo>
-                  <a:lnTo>
-                    <a:pt x="5944669" y="35607"/>
-                  </a:lnTo>
-                  <a:lnTo>
-                    <a:pt x="6016292" y="33421"/>
-                  </a:lnTo>
-                  <a:lnTo>
-                    <a:pt x="6087914" y="31230"/>
-                  </a:lnTo>
-                  <a:lnTo>
-                    <a:pt x="6159537" y="29034"/>
-                  </a:lnTo>
-                  <a:lnTo>
-                    <a:pt x="6231159" y="26832"/>
-                  </a:lnTo>
-                  <a:lnTo>
-                    <a:pt x="6302782" y="24625"/>
-                  </a:lnTo>
-                  <a:lnTo>
-                    <a:pt x="6374404" y="22413"/>
-                  </a:lnTo>
-                  <a:lnTo>
-                    <a:pt x="6446027" y="20196"/>
-                  </a:lnTo>
-                  <a:lnTo>
-                    <a:pt x="6517649" y="17973"/>
-                  </a:lnTo>
-                  <a:lnTo>
-                    <a:pt x="6589272" y="15745"/>
-                  </a:lnTo>
-                  <a:lnTo>
-                    <a:pt x="6660894" y="13512"/>
-                  </a:lnTo>
-                  <a:lnTo>
-                    <a:pt x="6732517" y="11273"/>
-                  </a:lnTo>
-                  <a:lnTo>
-                    <a:pt x="6804139" y="9029"/>
-                  </a:lnTo>
-                  <a:lnTo>
-                    <a:pt x="6875762" y="6780"/>
-                  </a:lnTo>
-                  <a:lnTo>
-                    <a:pt x="6947385" y="4525"/>
+                    <a:pt x="71622" y="198235"/>
+                  </a:lnTo>
+                  <a:lnTo>
+                    <a:pt x="143245" y="196437"/>
+                  </a:lnTo>
+                  <a:lnTo>
+                    <a:pt x="214867" y="194635"/>
+                  </a:lnTo>
+                  <a:lnTo>
+                    <a:pt x="286490" y="192829"/>
+                  </a:lnTo>
+                  <a:lnTo>
+                    <a:pt x="358112" y="191019"/>
+                  </a:lnTo>
+                  <a:lnTo>
+                    <a:pt x="429735" y="189204"/>
+                  </a:lnTo>
+                  <a:lnTo>
+                    <a:pt x="501357" y="187385"/>
+                  </a:lnTo>
+                  <a:lnTo>
+                    <a:pt x="572980" y="185561"/>
+                  </a:lnTo>
+                  <a:lnTo>
+                    <a:pt x="644602" y="183733"/>
+                  </a:lnTo>
+                  <a:lnTo>
+                    <a:pt x="716225" y="181901"/>
+                  </a:lnTo>
+                  <a:lnTo>
+                    <a:pt x="787847" y="180064"/>
+                  </a:lnTo>
+                  <a:lnTo>
+                    <a:pt x="859470" y="178223"/>
+                  </a:lnTo>
+                  <a:lnTo>
+                    <a:pt x="931092" y="176378"/>
+                  </a:lnTo>
+                  <a:lnTo>
+                    <a:pt x="1002715" y="174528"/>
+                  </a:lnTo>
+                  <a:lnTo>
+                    <a:pt x="1074337" y="172674"/>
+                  </a:lnTo>
+                  <a:lnTo>
+                    <a:pt x="1145960" y="170815"/>
+                  </a:lnTo>
+                  <a:lnTo>
+                    <a:pt x="1217582" y="168952"/>
+                  </a:lnTo>
+                  <a:lnTo>
+                    <a:pt x="1289205" y="167084"/>
+                  </a:lnTo>
+                  <a:lnTo>
+                    <a:pt x="1360827" y="165212"/>
+                  </a:lnTo>
+                  <a:lnTo>
+                    <a:pt x="1432450" y="163335"/>
+                  </a:lnTo>
+                  <a:lnTo>
+                    <a:pt x="1504073" y="161454"/>
+                  </a:lnTo>
+                  <a:lnTo>
+                    <a:pt x="1575695" y="159569"/>
+                  </a:lnTo>
+                  <a:lnTo>
+                    <a:pt x="1647318" y="157679"/>
+                  </a:lnTo>
+                  <a:lnTo>
+                    <a:pt x="1718940" y="155784"/>
+                  </a:lnTo>
+                  <a:lnTo>
+                    <a:pt x="1790563" y="153885"/>
+                  </a:lnTo>
+                  <a:lnTo>
+                    <a:pt x="1862185" y="151982"/>
+                  </a:lnTo>
+                  <a:lnTo>
+                    <a:pt x="1933808" y="150074"/>
+                  </a:lnTo>
+                  <a:lnTo>
+                    <a:pt x="2005430" y="148161"/>
+                  </a:lnTo>
+                  <a:lnTo>
+                    <a:pt x="2077053" y="146244"/>
+                  </a:lnTo>
+                  <a:lnTo>
+                    <a:pt x="2148675" y="144322"/>
+                  </a:lnTo>
+                  <a:lnTo>
+                    <a:pt x="2220298" y="142395"/>
+                  </a:lnTo>
+                  <a:lnTo>
+                    <a:pt x="2291920" y="140464"/>
+                  </a:lnTo>
+                  <a:lnTo>
+                    <a:pt x="2363543" y="138529"/>
+                  </a:lnTo>
+                  <a:lnTo>
+                    <a:pt x="2435165" y="136588"/>
+                  </a:lnTo>
+                  <a:lnTo>
+                    <a:pt x="2506788" y="134643"/>
+                  </a:lnTo>
+                  <a:lnTo>
+                    <a:pt x="2578410" y="132694"/>
+                  </a:lnTo>
+                  <a:lnTo>
+                    <a:pt x="2650033" y="130740"/>
+                  </a:lnTo>
+                  <a:lnTo>
+                    <a:pt x="2721655" y="128781"/>
+                  </a:lnTo>
+                  <a:lnTo>
+                    <a:pt x="2793278" y="126817"/>
+                  </a:lnTo>
+                  <a:lnTo>
+                    <a:pt x="2864901" y="124849"/>
+                  </a:lnTo>
+                  <a:lnTo>
+                    <a:pt x="2936523" y="122876"/>
+                  </a:lnTo>
+                  <a:lnTo>
+                    <a:pt x="3008146" y="120898"/>
+                  </a:lnTo>
+                  <a:lnTo>
+                    <a:pt x="3079768" y="118916"/>
+                  </a:lnTo>
+                  <a:lnTo>
+                    <a:pt x="3151391" y="116929"/>
+                  </a:lnTo>
+                  <a:lnTo>
+                    <a:pt x="3223013" y="114937"/>
+                  </a:lnTo>
+                  <a:lnTo>
+                    <a:pt x="3294636" y="112940"/>
+                  </a:lnTo>
+                  <a:lnTo>
+                    <a:pt x="3366258" y="110939"/>
+                  </a:lnTo>
+                  <a:lnTo>
+                    <a:pt x="3437881" y="108932"/>
+                  </a:lnTo>
+                  <a:lnTo>
+                    <a:pt x="3509503" y="106921"/>
+                  </a:lnTo>
+                  <a:lnTo>
+                    <a:pt x="3581126" y="104906"/>
+                  </a:lnTo>
+                  <a:lnTo>
+                    <a:pt x="3652748" y="102885"/>
+                  </a:lnTo>
+                  <a:lnTo>
+                    <a:pt x="3724371" y="100860"/>
+                  </a:lnTo>
+                  <a:lnTo>
+                    <a:pt x="3795993" y="98829"/>
+                  </a:lnTo>
+                  <a:lnTo>
+                    <a:pt x="3867616" y="96794"/>
+                  </a:lnTo>
+                  <a:lnTo>
+                    <a:pt x="3939238" y="94754"/>
+                  </a:lnTo>
+                  <a:lnTo>
+                    <a:pt x="4010861" y="92709"/>
+                  </a:lnTo>
+                  <a:lnTo>
+                    <a:pt x="4082483" y="90660"/>
+                  </a:lnTo>
+                  <a:lnTo>
+                    <a:pt x="4154106" y="88605"/>
+                  </a:lnTo>
+                  <a:lnTo>
+                    <a:pt x="4225729" y="86545"/>
+                  </a:lnTo>
+                  <a:lnTo>
+                    <a:pt x="4297351" y="84481"/>
+                  </a:lnTo>
+                  <a:lnTo>
+                    <a:pt x="4368974" y="82411"/>
+                  </a:lnTo>
+                  <a:lnTo>
+                    <a:pt x="4440596" y="80337"/>
+                  </a:lnTo>
+                  <a:lnTo>
+                    <a:pt x="4512219" y="78258"/>
+                  </a:lnTo>
+                  <a:lnTo>
+                    <a:pt x="4583841" y="76173"/>
+                  </a:lnTo>
+                  <a:lnTo>
+                    <a:pt x="4655464" y="74084"/>
+                  </a:lnTo>
+                  <a:lnTo>
+                    <a:pt x="4727086" y="71990"/>
+                  </a:lnTo>
+                  <a:lnTo>
+                    <a:pt x="4798709" y="69891"/>
+                  </a:lnTo>
+                  <a:lnTo>
+                    <a:pt x="4870331" y="67786"/>
+                  </a:lnTo>
+                  <a:lnTo>
+                    <a:pt x="4941954" y="65677"/>
+                  </a:lnTo>
+                  <a:lnTo>
+                    <a:pt x="5013576" y="63563"/>
+                  </a:lnTo>
+                  <a:lnTo>
+                    <a:pt x="5085199" y="61443"/>
+                  </a:lnTo>
+                  <a:lnTo>
+                    <a:pt x="5156821" y="59319"/>
+                  </a:lnTo>
+                  <a:lnTo>
+                    <a:pt x="5228444" y="57189"/>
+                  </a:lnTo>
+                  <a:lnTo>
+                    <a:pt x="5300066" y="55055"/>
+                  </a:lnTo>
+                  <a:lnTo>
+                    <a:pt x="5371689" y="52915"/>
+                  </a:lnTo>
+                  <a:lnTo>
+                    <a:pt x="5443311" y="50770"/>
+                  </a:lnTo>
+                  <a:lnTo>
+                    <a:pt x="5514934" y="48620"/>
+                  </a:lnTo>
+                  <a:lnTo>
+                    <a:pt x="5586557" y="46465"/>
+                  </a:lnTo>
+                  <a:lnTo>
+                    <a:pt x="5658179" y="44305"/>
+                  </a:lnTo>
+                  <a:lnTo>
+                    <a:pt x="5729802" y="42139"/>
+                  </a:lnTo>
+                  <a:lnTo>
+                    <a:pt x="5801424" y="39969"/>
+                  </a:lnTo>
+                  <a:lnTo>
+                    <a:pt x="5873047" y="37793"/>
+                  </a:lnTo>
+                  <a:lnTo>
+                    <a:pt x="5944669" y="35612"/>
+                  </a:lnTo>
+                  <a:lnTo>
+                    <a:pt x="6016292" y="33426"/>
+                  </a:lnTo>
+                  <a:lnTo>
+                    <a:pt x="6087914" y="31235"/>
+                  </a:lnTo>
+                  <a:lnTo>
+                    <a:pt x="6159537" y="29038"/>
+                  </a:lnTo>
+                  <a:lnTo>
+                    <a:pt x="6231159" y="26836"/>
+                  </a:lnTo>
+                  <a:lnTo>
+                    <a:pt x="6302782" y="24629"/>
+                  </a:lnTo>
+                  <a:lnTo>
+                    <a:pt x="6374404" y="22416"/>
+                  </a:lnTo>
+                  <a:lnTo>
+                    <a:pt x="6446027" y="20199"/>
+                  </a:lnTo>
+                  <a:lnTo>
+                    <a:pt x="6517649" y="17976"/>
+                  </a:lnTo>
+                  <a:lnTo>
+                    <a:pt x="6589272" y="15747"/>
+                  </a:lnTo>
+                  <a:lnTo>
+                    <a:pt x="6660894" y="13514"/>
+                  </a:lnTo>
+                  <a:lnTo>
+                    <a:pt x="6732517" y="11275"/>
+                  </a:lnTo>
+                  <a:lnTo>
+                    <a:pt x="6804139" y="9031"/>
+                  </a:lnTo>
+                  <a:lnTo>
+                    <a:pt x="6875762" y="6781"/>
+                  </a:lnTo>
+                  <a:lnTo>
+                    <a:pt x="6947385" y="4526"/>
                   </a:lnTo>
                   <a:lnTo>
                     <a:pt x="7019007" y="2265"/>
@@ -4864,7 +4864,7 @@
           </p:nvSpPr>
           <p:spPr>
             <a:xfrm>
-              <a:off x="4164901" y="2073503"/>
+              <a:off x="4170171" y="2073503"/>
               <a:ext cx="0" cy="3649639"/>
             </a:xfrm>
             <a:custGeom>
@@ -5137,7 +5137,7 @@
           </p:nvSpPr>
           <p:spPr>
             <a:xfrm>
-              <a:off x="1382692" y="5785772"/>
+              <a:off x="1383511" y="5785772"/>
               <a:ext cx="161574" cy="80101"/>
             </a:xfrm>
             <a:prstGeom prst="rect">
@@ -5183,7 +5183,7 @@
           </p:nvSpPr>
           <p:spPr>
             <a:xfrm>
-              <a:off x="2284877" y="5785772"/>
+              <a:off x="2285456" y="5785772"/>
               <a:ext cx="161574" cy="80101"/>
             </a:xfrm>
             <a:prstGeom prst="rect">
@@ -5229,7 +5229,7 @@
           </p:nvSpPr>
           <p:spPr>
             <a:xfrm>
-              <a:off x="3187061" y="5785772"/>
+              <a:off x="3187401" y="5785772"/>
               <a:ext cx="161574" cy="80101"/>
             </a:xfrm>
             <a:prstGeom prst="rect">
@@ -5275,7 +5275,7 @@
           </p:nvSpPr>
           <p:spPr>
             <a:xfrm>
-              <a:off x="4138944" y="5785772"/>
+              <a:off x="4139043" y="5785772"/>
               <a:ext cx="62179" cy="80101"/>
             </a:xfrm>
             <a:prstGeom prst="rect">
@@ -5321,7 +5321,7 @@
           </p:nvSpPr>
           <p:spPr>
             <a:xfrm>
-              <a:off x="5010039" y="5785772"/>
+              <a:off x="5009898" y="5785772"/>
               <a:ext cx="124358" cy="80101"/>
             </a:xfrm>
             <a:prstGeom prst="rect">
@@ -5367,7 +5367,7 @@
           </p:nvSpPr>
           <p:spPr>
             <a:xfrm>
-              <a:off x="5912223" y="5785772"/>
+              <a:off x="5911843" y="5785772"/>
               <a:ext cx="124358" cy="80101"/>
             </a:xfrm>
             <a:prstGeom prst="rect">
@@ -5413,7 +5413,7 @@
           </p:nvSpPr>
           <p:spPr>
             <a:xfrm>
-              <a:off x="6814408" y="5785772"/>
+              <a:off x="6813788" y="5785772"/>
               <a:ext cx="124358" cy="80101"/>
             </a:xfrm>
             <a:prstGeom prst="rect">
@@ -5459,7 +5459,7 @@
           </p:nvSpPr>
           <p:spPr>
             <a:xfrm>
-              <a:off x="7716592" y="5785772"/>
+              <a:off x="7715733" y="5785772"/>
               <a:ext cx="124358" cy="80101"/>
             </a:xfrm>
             <a:prstGeom prst="rect">
@@ -5630,7 +5630,7 @@
                   <a:latin typeface="Helvetica"/>
                   <a:cs typeface="Helvetica"/>
                 </a:rPr>
-                <a:t>subHR per 10 % decline: 0.97 (0.56-1.67), p = 0.914  |  per IQR decline (Δ = 27.4 %): 0.92 (0.21-4.12)  |  IQR: [-12.6, 14.8] %</a:t>
+                <a:t>subHR per 10 % decline: 0.97 (0.56-1.67), p = 0.914  |  per IQR decline (Δ = 27.2 %): 0.92 (0.21-4.07)  |  IQR: [-12.3, 14.9] %</a:t>
               </a:r>
             </a:p>
           </p:txBody>
